--- a/docs/pptx/whole/ritu-linsubhr-disc-anemia2.pptx
+++ b/docs/pptx/whole/ritu-linsubhr-disc-anemia2.pptx
@@ -2443,7 +2443,7 @@
           </p:nvSpPr>
           <p:spPr>
             <a:xfrm>
-              <a:off x="1942521" y="2073503"/>
+              <a:off x="1943067" y="2073503"/>
               <a:ext cx="0" cy="3649639"/>
             </a:xfrm>
             <a:custGeom>
@@ -2486,7 +2486,7 @@
           </p:nvSpPr>
           <p:spPr>
             <a:xfrm>
-              <a:off x="4460699" y="2073503"/>
+              <a:off x="4460487" y="2073503"/>
               <a:ext cx="0" cy="3649639"/>
             </a:xfrm>
             <a:custGeom>
@@ -2529,7 +2529,7 @@
           </p:nvSpPr>
           <p:spPr>
             <a:xfrm>
-              <a:off x="6978877" y="2073503"/>
+              <a:off x="6977907" y="2073503"/>
               <a:ext cx="0" cy="3649639"/>
             </a:xfrm>
             <a:custGeom>
@@ -2787,7 +2787,7 @@
           </p:nvSpPr>
           <p:spPr>
             <a:xfrm>
-              <a:off x="3201610" y="2073503"/>
+              <a:off x="3201777" y="2073503"/>
               <a:ext cx="0" cy="3649639"/>
             </a:xfrm>
             <a:custGeom>
@@ -2830,7 +2830,7 @@
           </p:nvSpPr>
           <p:spPr>
             <a:xfrm>
-              <a:off x="5719788" y="2073503"/>
+              <a:off x="5719197" y="2073503"/>
               <a:ext cx="0" cy="3649639"/>
             </a:xfrm>
             <a:custGeom>
@@ -2873,7 +2873,7 @@
           </p:nvSpPr>
           <p:spPr>
             <a:xfrm>
-              <a:off x="8237966" y="2073503"/>
+              <a:off x="8236616" y="2073503"/>
               <a:ext cx="0" cy="3649639"/>
             </a:xfrm>
             <a:custGeom>
@@ -2916,612 +2916,612 @@
           </p:nvSpPr>
           <p:spPr>
             <a:xfrm>
-              <a:off x="1172049" y="2600126"/>
-              <a:ext cx="7090630" cy="2538282"/>
+              <a:off x="1172049" y="2482285"/>
+              <a:ext cx="7090630" cy="2663155"/>
             </a:xfrm>
             <a:custGeom>
               <a:avLst/>
               <a:pathLst>
-                <a:path w="7090630" h="2538282">
+                <a:path w="7090630" h="2663155">
                   <a:moveTo>
                     <a:pt x="0" y="0"/>
                   </a:moveTo>
                   <a:lnTo>
-                    <a:pt x="71622" y="57807"/>
-                  </a:lnTo>
-                  <a:lnTo>
-                    <a:pt x="143245" y="114485"/>
-                  </a:lnTo>
-                  <a:lnTo>
-                    <a:pt x="214867" y="170055"/>
-                  </a:lnTo>
-                  <a:lnTo>
-                    <a:pt x="286490" y="224538"/>
-                  </a:lnTo>
-                  <a:lnTo>
-                    <a:pt x="358112" y="277956"/>
-                  </a:lnTo>
-                  <a:lnTo>
-                    <a:pt x="429735" y="330330"/>
-                  </a:lnTo>
-                  <a:lnTo>
-                    <a:pt x="501357" y="381681"/>
-                  </a:lnTo>
-                  <a:lnTo>
-                    <a:pt x="572980" y="432027"/>
-                  </a:lnTo>
-                  <a:lnTo>
-                    <a:pt x="644602" y="481389"/>
-                  </a:lnTo>
-                  <a:lnTo>
-                    <a:pt x="716225" y="529786"/>
-                  </a:lnTo>
-                  <a:lnTo>
-                    <a:pt x="787847" y="577237"/>
-                  </a:lnTo>
-                  <a:lnTo>
-                    <a:pt x="859470" y="623761"/>
-                  </a:lnTo>
-                  <a:lnTo>
-                    <a:pt x="931092" y="669375"/>
-                  </a:lnTo>
-                  <a:lnTo>
-                    <a:pt x="1002715" y="714097"/>
-                  </a:lnTo>
-                  <a:lnTo>
-                    <a:pt x="1074337" y="757945"/>
-                  </a:lnTo>
-                  <a:lnTo>
-                    <a:pt x="1145960" y="800936"/>
-                  </a:lnTo>
-                  <a:lnTo>
-                    <a:pt x="1217582" y="843087"/>
-                  </a:lnTo>
-                  <a:lnTo>
-                    <a:pt x="1289205" y="884413"/>
-                  </a:lnTo>
-                  <a:lnTo>
-                    <a:pt x="1360827" y="924932"/>
-                  </a:lnTo>
-                  <a:lnTo>
-                    <a:pt x="1432450" y="964659"/>
-                  </a:lnTo>
-                  <a:lnTo>
-                    <a:pt x="1504073" y="1003609"/>
-                  </a:lnTo>
-                  <a:lnTo>
-                    <a:pt x="1575695" y="1041797"/>
-                  </a:lnTo>
-                  <a:lnTo>
-                    <a:pt x="1647318" y="1079239"/>
-                  </a:lnTo>
-                  <a:lnTo>
-                    <a:pt x="1718940" y="1115949"/>
-                  </a:lnTo>
-                  <a:lnTo>
-                    <a:pt x="1790563" y="1151942"/>
-                  </a:lnTo>
-                  <a:lnTo>
-                    <a:pt x="1862185" y="1187230"/>
-                  </a:lnTo>
-                  <a:lnTo>
-                    <a:pt x="1933808" y="1221829"/>
-                  </a:lnTo>
-                  <a:lnTo>
-                    <a:pt x="2005430" y="1255752"/>
-                  </a:lnTo>
-                  <a:lnTo>
-                    <a:pt x="2077053" y="1289011"/>
-                  </a:lnTo>
-                  <a:lnTo>
-                    <a:pt x="2148675" y="1321621"/>
-                  </a:lnTo>
-                  <a:lnTo>
-                    <a:pt x="2220298" y="1353593"/>
-                  </a:lnTo>
-                  <a:lnTo>
-                    <a:pt x="2291920" y="1384939"/>
-                  </a:lnTo>
-                  <a:lnTo>
-                    <a:pt x="2363543" y="1415673"/>
-                  </a:lnTo>
-                  <a:lnTo>
-                    <a:pt x="2435165" y="1445807"/>
-                  </a:lnTo>
-                  <a:lnTo>
-                    <a:pt x="2506788" y="1475351"/>
-                  </a:lnTo>
-                  <a:lnTo>
-                    <a:pt x="2578410" y="1504317"/>
-                  </a:lnTo>
-                  <a:lnTo>
-                    <a:pt x="2650033" y="1532718"/>
-                  </a:lnTo>
-                  <a:lnTo>
-                    <a:pt x="2721655" y="1560563"/>
-                  </a:lnTo>
-                  <a:lnTo>
-                    <a:pt x="2793278" y="1587864"/>
-                  </a:lnTo>
-                  <a:lnTo>
-                    <a:pt x="2864901" y="1614631"/>
-                  </a:lnTo>
-                  <a:lnTo>
-                    <a:pt x="2936523" y="1640875"/>
-                  </a:lnTo>
-                  <a:lnTo>
-                    <a:pt x="3008146" y="1666606"/>
-                  </a:lnTo>
-                  <a:lnTo>
-                    <a:pt x="3079768" y="1691834"/>
-                  </a:lnTo>
-                  <a:lnTo>
-                    <a:pt x="3151391" y="1716568"/>
-                  </a:lnTo>
-                  <a:lnTo>
-                    <a:pt x="3223013" y="1740819"/>
-                  </a:lnTo>
-                  <a:lnTo>
-                    <a:pt x="3294636" y="1764596"/>
-                  </a:lnTo>
-                  <a:lnTo>
-                    <a:pt x="3366258" y="1787909"/>
-                  </a:lnTo>
-                  <a:lnTo>
-                    <a:pt x="3437881" y="1810765"/>
-                  </a:lnTo>
-                  <a:lnTo>
-                    <a:pt x="3509503" y="1833175"/>
-                  </a:lnTo>
-                  <a:lnTo>
-                    <a:pt x="3581126" y="1855147"/>
-                  </a:lnTo>
-                  <a:lnTo>
-                    <a:pt x="3652748" y="1876689"/>
-                  </a:lnTo>
-                  <a:lnTo>
-                    <a:pt x="3724371" y="1897810"/>
-                  </a:lnTo>
-                  <a:lnTo>
-                    <a:pt x="3795993" y="1918518"/>
-                  </a:lnTo>
-                  <a:lnTo>
-                    <a:pt x="3867616" y="1938821"/>
-                  </a:lnTo>
-                  <a:lnTo>
-                    <a:pt x="3939238" y="1958728"/>
-                  </a:lnTo>
-                  <a:lnTo>
-                    <a:pt x="4010861" y="1978245"/>
-                  </a:lnTo>
-                  <a:lnTo>
-                    <a:pt x="4082483" y="1997381"/>
-                  </a:lnTo>
-                  <a:lnTo>
-                    <a:pt x="4154106" y="2016142"/>
-                  </a:lnTo>
-                  <a:lnTo>
-                    <a:pt x="4225729" y="2034537"/>
-                  </a:lnTo>
-                  <a:lnTo>
-                    <a:pt x="4297351" y="2052572"/>
-                  </a:lnTo>
-                  <a:lnTo>
-                    <a:pt x="4368974" y="2070255"/>
-                  </a:lnTo>
-                  <a:lnTo>
-                    <a:pt x="4440596" y="2087592"/>
-                  </a:lnTo>
-                  <a:lnTo>
-                    <a:pt x="4512219" y="2104590"/>
-                  </a:lnTo>
-                  <a:lnTo>
-                    <a:pt x="4583841" y="2121256"/>
-                  </a:lnTo>
-                  <a:lnTo>
-                    <a:pt x="4655464" y="2126420"/>
-                  </a:lnTo>
-                  <a:lnTo>
-                    <a:pt x="4727086" y="2124386"/>
-                  </a:lnTo>
-                  <a:lnTo>
-                    <a:pt x="4798709" y="2122347"/>
-                  </a:lnTo>
-                  <a:lnTo>
-                    <a:pt x="4870331" y="2120302"/>
-                  </a:lnTo>
-                  <a:lnTo>
-                    <a:pt x="4941954" y="2118253"/>
-                  </a:lnTo>
-                  <a:lnTo>
-                    <a:pt x="5013576" y="2116199"/>
-                  </a:lnTo>
-                  <a:lnTo>
-                    <a:pt x="5085199" y="2114140"/>
-                  </a:lnTo>
-                  <a:lnTo>
-                    <a:pt x="5156821" y="2112075"/>
-                  </a:lnTo>
-                  <a:lnTo>
-                    <a:pt x="5228444" y="2110006"/>
-                  </a:lnTo>
-                  <a:lnTo>
-                    <a:pt x="5300066" y="2107932"/>
-                  </a:lnTo>
-                  <a:lnTo>
-                    <a:pt x="5371689" y="2105852"/>
-                  </a:lnTo>
-                  <a:lnTo>
-                    <a:pt x="5443311" y="2103767"/>
-                  </a:lnTo>
-                  <a:lnTo>
-                    <a:pt x="5514934" y="2101678"/>
-                  </a:lnTo>
-                  <a:lnTo>
-                    <a:pt x="5586557" y="2099583"/>
-                  </a:lnTo>
-                  <a:lnTo>
-                    <a:pt x="5658179" y="2097483"/>
-                  </a:lnTo>
-                  <a:lnTo>
-                    <a:pt x="5729802" y="2095378"/>
-                  </a:lnTo>
-                  <a:lnTo>
-                    <a:pt x="5801424" y="2093268"/>
-                  </a:lnTo>
-                  <a:lnTo>
-                    <a:pt x="5873047" y="2091152"/>
-                  </a:lnTo>
-                  <a:lnTo>
-                    <a:pt x="5944669" y="2089032"/>
-                  </a:lnTo>
-                  <a:lnTo>
-                    <a:pt x="6016292" y="2086906"/>
-                  </a:lnTo>
-                  <a:lnTo>
-                    <a:pt x="6087914" y="2084775"/>
-                  </a:lnTo>
-                  <a:lnTo>
-                    <a:pt x="6159537" y="2082639"/>
-                  </a:lnTo>
-                  <a:lnTo>
-                    <a:pt x="6231159" y="2080497"/>
-                  </a:lnTo>
-                  <a:lnTo>
-                    <a:pt x="6302782" y="2078351"/>
-                  </a:lnTo>
-                  <a:lnTo>
-                    <a:pt x="6374404" y="2076199"/>
-                  </a:lnTo>
-                  <a:lnTo>
-                    <a:pt x="6446027" y="2074041"/>
-                  </a:lnTo>
-                  <a:lnTo>
-                    <a:pt x="6517649" y="2071879"/>
-                  </a:lnTo>
-                  <a:lnTo>
-                    <a:pt x="6589272" y="2069711"/>
-                  </a:lnTo>
-                  <a:lnTo>
-                    <a:pt x="6660894" y="2067538"/>
-                  </a:lnTo>
-                  <a:lnTo>
-                    <a:pt x="6732517" y="2065360"/>
-                  </a:lnTo>
-                  <a:lnTo>
-                    <a:pt x="6804139" y="2063176"/>
-                  </a:lnTo>
-                  <a:lnTo>
-                    <a:pt x="6875762" y="2060987"/>
-                  </a:lnTo>
-                  <a:lnTo>
-                    <a:pt x="6947385" y="2058792"/>
-                  </a:lnTo>
-                  <a:lnTo>
-                    <a:pt x="7019007" y="2056592"/>
-                  </a:lnTo>
-                  <a:lnTo>
-                    <a:pt x="7090630" y="2054387"/>
-                  </a:lnTo>
-                  <a:lnTo>
-                    <a:pt x="7090630" y="2538282"/>
-                  </a:lnTo>
-                  <a:lnTo>
-                    <a:pt x="7019007" y="2529931"/>
-                  </a:lnTo>
-                  <a:lnTo>
-                    <a:pt x="6947385" y="2521414"/>
-                  </a:lnTo>
-                  <a:lnTo>
-                    <a:pt x="6875762" y="2512726"/>
-                  </a:lnTo>
-                  <a:lnTo>
-                    <a:pt x="6804139" y="2503866"/>
-                  </a:lnTo>
-                  <a:lnTo>
-                    <a:pt x="6732517" y="2494828"/>
-                  </a:lnTo>
-                  <a:lnTo>
-                    <a:pt x="6660894" y="2485611"/>
-                  </a:lnTo>
-                  <a:lnTo>
-                    <a:pt x="6589272" y="2476210"/>
-                  </a:lnTo>
-                  <a:lnTo>
-                    <a:pt x="6517649" y="2466621"/>
-                  </a:lnTo>
-                  <a:lnTo>
-                    <a:pt x="6446027" y="2456841"/>
-                  </a:lnTo>
-                  <a:lnTo>
-                    <a:pt x="6374404" y="2446867"/>
-                  </a:lnTo>
-                  <a:lnTo>
-                    <a:pt x="6302782" y="2436693"/>
-                  </a:lnTo>
-                  <a:lnTo>
-                    <a:pt x="6231159" y="2426316"/>
-                  </a:lnTo>
-                  <a:lnTo>
-                    <a:pt x="6159537" y="2415733"/>
-                  </a:lnTo>
-                  <a:lnTo>
-                    <a:pt x="6087914" y="2404938"/>
-                  </a:lnTo>
-                  <a:lnTo>
-                    <a:pt x="6016292" y="2393929"/>
-                  </a:lnTo>
-                  <a:lnTo>
-                    <a:pt x="5944669" y="2382700"/>
-                  </a:lnTo>
-                  <a:lnTo>
-                    <a:pt x="5873047" y="2371247"/>
-                  </a:lnTo>
-                  <a:lnTo>
-                    <a:pt x="5801424" y="2359565"/>
-                  </a:lnTo>
-                  <a:lnTo>
-                    <a:pt x="5729802" y="2347651"/>
-                  </a:lnTo>
-                  <a:lnTo>
-                    <a:pt x="5658179" y="2335499"/>
-                  </a:lnTo>
-                  <a:lnTo>
-                    <a:pt x="5586557" y="2323105"/>
-                  </a:lnTo>
-                  <a:lnTo>
-                    <a:pt x="5514934" y="2310463"/>
-                  </a:lnTo>
-                  <a:lnTo>
-                    <a:pt x="5443311" y="2297570"/>
-                  </a:lnTo>
-                  <a:lnTo>
-                    <a:pt x="5371689" y="2284420"/>
-                  </a:lnTo>
-                  <a:lnTo>
-                    <a:pt x="5300066" y="2271007"/>
-                  </a:lnTo>
-                  <a:lnTo>
-                    <a:pt x="5228444" y="2257327"/>
-                  </a:lnTo>
-                  <a:lnTo>
-                    <a:pt x="5156821" y="2243374"/>
-                  </a:lnTo>
-                  <a:lnTo>
-                    <a:pt x="5085199" y="2229143"/>
-                  </a:lnTo>
-                  <a:lnTo>
-                    <a:pt x="5013576" y="2214628"/>
-                  </a:lnTo>
-                  <a:lnTo>
-                    <a:pt x="4941954" y="2199824"/>
-                  </a:lnTo>
-                  <a:lnTo>
-                    <a:pt x="4870331" y="2184725"/>
-                  </a:lnTo>
-                  <a:lnTo>
-                    <a:pt x="4798709" y="2169324"/>
-                  </a:lnTo>
-                  <a:lnTo>
-                    <a:pt x="4727086" y="2153617"/>
-                  </a:lnTo>
-                  <a:lnTo>
-                    <a:pt x="4655464" y="2137596"/>
-                  </a:lnTo>
-                  <a:lnTo>
-                    <a:pt x="4583841" y="2128449"/>
-                  </a:lnTo>
-                  <a:lnTo>
-                    <a:pt x="4512219" y="2130474"/>
-                  </a:lnTo>
-                  <a:lnTo>
-                    <a:pt x="4440596" y="2132493"/>
-                  </a:lnTo>
-                  <a:lnTo>
-                    <a:pt x="4368974" y="2134507"/>
-                  </a:lnTo>
-                  <a:lnTo>
-                    <a:pt x="4297351" y="2136517"/>
-                  </a:lnTo>
-                  <a:lnTo>
-                    <a:pt x="4225729" y="2138521"/>
-                  </a:lnTo>
-                  <a:lnTo>
-                    <a:pt x="4154106" y="2140521"/>
-                  </a:lnTo>
-                  <a:lnTo>
-                    <a:pt x="4082483" y="2142516"/>
-                  </a:lnTo>
-                  <a:lnTo>
-                    <a:pt x="4010861" y="2144506"/>
-                  </a:lnTo>
-                  <a:lnTo>
-                    <a:pt x="3939238" y="2146491"/>
-                  </a:lnTo>
-                  <a:lnTo>
-                    <a:pt x="3867616" y="2148471"/>
-                  </a:lnTo>
-                  <a:lnTo>
-                    <a:pt x="3795993" y="2150447"/>
-                  </a:lnTo>
-                  <a:lnTo>
-                    <a:pt x="3724371" y="2152417"/>
-                  </a:lnTo>
-                  <a:lnTo>
-                    <a:pt x="3652748" y="2154383"/>
-                  </a:lnTo>
-                  <a:lnTo>
-                    <a:pt x="3581126" y="2156344"/>
-                  </a:lnTo>
-                  <a:lnTo>
-                    <a:pt x="3509503" y="2158300"/>
-                  </a:lnTo>
-                  <a:lnTo>
-                    <a:pt x="3437881" y="2160251"/>
-                  </a:lnTo>
-                  <a:lnTo>
-                    <a:pt x="3366258" y="2162198"/>
-                  </a:lnTo>
-                  <a:lnTo>
-                    <a:pt x="3294636" y="2164140"/>
-                  </a:lnTo>
-                  <a:lnTo>
-                    <a:pt x="3223013" y="2166077"/>
-                  </a:lnTo>
-                  <a:lnTo>
-                    <a:pt x="3151391" y="2168009"/>
-                  </a:lnTo>
-                  <a:lnTo>
-                    <a:pt x="3079768" y="2169937"/>
-                  </a:lnTo>
-                  <a:lnTo>
-                    <a:pt x="3008146" y="2171860"/>
-                  </a:lnTo>
-                  <a:lnTo>
-                    <a:pt x="2936523" y="2173778"/>
-                  </a:lnTo>
-                  <a:lnTo>
-                    <a:pt x="2864901" y="2175692"/>
-                  </a:lnTo>
-                  <a:lnTo>
-                    <a:pt x="2793278" y="2177601"/>
-                  </a:lnTo>
-                  <a:lnTo>
-                    <a:pt x="2721655" y="2179505"/>
-                  </a:lnTo>
-                  <a:lnTo>
-                    <a:pt x="2650033" y="2181405"/>
-                  </a:lnTo>
-                  <a:lnTo>
-                    <a:pt x="2578410" y="2183299"/>
-                  </a:lnTo>
-                  <a:lnTo>
-                    <a:pt x="2506788" y="2185190"/>
-                  </a:lnTo>
-                  <a:lnTo>
-                    <a:pt x="2435165" y="2187075"/>
-                  </a:lnTo>
-                  <a:lnTo>
-                    <a:pt x="2363543" y="2188957"/>
-                  </a:lnTo>
-                  <a:lnTo>
-                    <a:pt x="2291920" y="2190833"/>
-                  </a:lnTo>
-                  <a:lnTo>
-                    <a:pt x="2220298" y="2192705"/>
-                  </a:lnTo>
-                  <a:lnTo>
-                    <a:pt x="2148675" y="2194572"/>
-                  </a:lnTo>
-                  <a:lnTo>
-                    <a:pt x="2077053" y="2196435"/>
-                  </a:lnTo>
-                  <a:lnTo>
-                    <a:pt x="2005430" y="2198293"/>
-                  </a:lnTo>
-                  <a:lnTo>
-                    <a:pt x="1933808" y="2200147"/>
-                  </a:lnTo>
-                  <a:lnTo>
-                    <a:pt x="1862185" y="2201996"/>
-                  </a:lnTo>
-                  <a:lnTo>
-                    <a:pt x="1790563" y="2203841"/>
-                  </a:lnTo>
-                  <a:lnTo>
-                    <a:pt x="1718940" y="2205681"/>
-                  </a:lnTo>
-                  <a:lnTo>
-                    <a:pt x="1647318" y="2207517"/>
-                  </a:lnTo>
-                  <a:lnTo>
-                    <a:pt x="1575695" y="2209348"/>
-                  </a:lnTo>
-                  <a:lnTo>
-                    <a:pt x="1504073" y="2211174"/>
-                  </a:lnTo>
-                  <a:lnTo>
-                    <a:pt x="1432450" y="2212997"/>
-                  </a:lnTo>
-                  <a:lnTo>
-                    <a:pt x="1360827" y="2214814"/>
-                  </a:lnTo>
-                  <a:lnTo>
-                    <a:pt x="1289205" y="2216628"/>
-                  </a:lnTo>
-                  <a:lnTo>
-                    <a:pt x="1217582" y="2218437"/>
-                  </a:lnTo>
-                  <a:lnTo>
-                    <a:pt x="1145960" y="2220241"/>
-                  </a:lnTo>
-                  <a:lnTo>
-                    <a:pt x="1074337" y="2222041"/>
-                  </a:lnTo>
-                  <a:lnTo>
-                    <a:pt x="1002715" y="2223837"/>
-                  </a:lnTo>
-                  <a:lnTo>
-                    <a:pt x="931092" y="2225628"/>
-                  </a:lnTo>
-                  <a:lnTo>
-                    <a:pt x="859470" y="2227415"/>
-                  </a:lnTo>
-                  <a:lnTo>
-                    <a:pt x="787847" y="2229198"/>
-                  </a:lnTo>
-                  <a:lnTo>
-                    <a:pt x="716225" y="2230976"/>
-                  </a:lnTo>
-                  <a:lnTo>
-                    <a:pt x="644602" y="2232750"/>
-                  </a:lnTo>
-                  <a:lnTo>
-                    <a:pt x="572980" y="2234519"/>
-                  </a:lnTo>
-                  <a:lnTo>
-                    <a:pt x="501357" y="2236284"/>
-                  </a:lnTo>
-                  <a:lnTo>
-                    <a:pt x="429735" y="2238045"/>
-                  </a:lnTo>
-                  <a:lnTo>
-                    <a:pt x="358112" y="2239802"/>
-                  </a:lnTo>
-                  <a:lnTo>
-                    <a:pt x="286490" y="2241554"/>
-                  </a:lnTo>
-                  <a:lnTo>
-                    <a:pt x="214867" y="2243302"/>
-                  </a:lnTo>
-                  <a:lnTo>
-                    <a:pt x="143245" y="2245046"/>
-                  </a:lnTo>
-                  <a:lnTo>
-                    <a:pt x="71622" y="2246785"/>
-                  </a:lnTo>
-                  <a:lnTo>
-                    <a:pt x="0" y="2248521"/>
+                    <a:pt x="71622" y="61816"/>
+                  </a:lnTo>
+                  <a:lnTo>
+                    <a:pt x="143245" y="122390"/>
+                  </a:lnTo>
+                  <a:lnTo>
+                    <a:pt x="214867" y="181746"/>
+                  </a:lnTo>
+                  <a:lnTo>
+                    <a:pt x="286490" y="239909"/>
+                  </a:lnTo>
+                  <a:lnTo>
+                    <a:pt x="358112" y="296902"/>
+                  </a:lnTo>
+                  <a:lnTo>
+                    <a:pt x="429735" y="352750"/>
+                  </a:lnTo>
+                  <a:lnTo>
+                    <a:pt x="501357" y="407475"/>
+                  </a:lnTo>
+                  <a:lnTo>
+                    <a:pt x="572980" y="461100"/>
+                  </a:lnTo>
+                  <a:lnTo>
+                    <a:pt x="644602" y="513647"/>
+                  </a:lnTo>
+                  <a:lnTo>
+                    <a:pt x="716225" y="565138"/>
+                  </a:lnTo>
+                  <a:lnTo>
+                    <a:pt x="787847" y="615593"/>
+                  </a:lnTo>
+                  <a:lnTo>
+                    <a:pt x="859470" y="665034"/>
+                  </a:lnTo>
+                  <a:lnTo>
+                    <a:pt x="931092" y="713481"/>
+                  </a:lnTo>
+                  <a:lnTo>
+                    <a:pt x="1002715" y="760955"/>
+                  </a:lnTo>
+                  <a:lnTo>
+                    <a:pt x="1074337" y="807474"/>
+                  </a:lnTo>
+                  <a:lnTo>
+                    <a:pt x="1145960" y="853057"/>
+                  </a:lnTo>
+                  <a:lnTo>
+                    <a:pt x="1217582" y="897725"/>
+                  </a:lnTo>
+                  <a:lnTo>
+                    <a:pt x="1289205" y="941494"/>
+                  </a:lnTo>
+                  <a:lnTo>
+                    <a:pt x="1360827" y="984384"/>
+                  </a:lnTo>
+                  <a:lnTo>
+                    <a:pt x="1432450" y="1026411"/>
+                  </a:lnTo>
+                  <a:lnTo>
+                    <a:pt x="1504073" y="1067593"/>
+                  </a:lnTo>
+                  <a:lnTo>
+                    <a:pt x="1575695" y="1107948"/>
+                  </a:lnTo>
+                  <a:lnTo>
+                    <a:pt x="1647318" y="1147491"/>
+                  </a:lnTo>
+                  <a:lnTo>
+                    <a:pt x="1718940" y="1186239"/>
+                  </a:lnTo>
+                  <a:lnTo>
+                    <a:pt x="1790563" y="1224209"/>
+                  </a:lnTo>
+                  <a:lnTo>
+                    <a:pt x="1862185" y="1261415"/>
+                  </a:lnTo>
+                  <a:lnTo>
+                    <a:pt x="1933808" y="1297873"/>
+                  </a:lnTo>
+                  <a:lnTo>
+                    <a:pt x="2005430" y="1333598"/>
+                  </a:lnTo>
+                  <a:lnTo>
+                    <a:pt x="2077053" y="1368605"/>
+                  </a:lnTo>
+                  <a:lnTo>
+                    <a:pt x="2148675" y="1402908"/>
+                  </a:lnTo>
+                  <a:lnTo>
+                    <a:pt x="2220298" y="1436522"/>
+                  </a:lnTo>
+                  <a:lnTo>
+                    <a:pt x="2291920" y="1469460"/>
+                  </a:lnTo>
+                  <a:lnTo>
+                    <a:pt x="2363543" y="1501735"/>
+                  </a:lnTo>
+                  <a:lnTo>
+                    <a:pt x="2435165" y="1533362"/>
+                  </a:lnTo>
+                  <a:lnTo>
+                    <a:pt x="2506788" y="1564353"/>
+                  </a:lnTo>
+                  <a:lnTo>
+                    <a:pt x="2578410" y="1594721"/>
+                  </a:lnTo>
+                  <a:lnTo>
+                    <a:pt x="2650033" y="1624479"/>
+                  </a:lnTo>
+                  <a:lnTo>
+                    <a:pt x="2721655" y="1653638"/>
+                  </a:lnTo>
+                  <a:lnTo>
+                    <a:pt x="2793278" y="1682211"/>
+                  </a:lnTo>
+                  <a:lnTo>
+                    <a:pt x="2864901" y="1710210"/>
+                  </a:lnTo>
+                  <a:lnTo>
+                    <a:pt x="2936523" y="1737646"/>
+                  </a:lnTo>
+                  <a:lnTo>
+                    <a:pt x="3008146" y="1764530"/>
+                  </a:lnTo>
+                  <a:lnTo>
+                    <a:pt x="3079768" y="1790874"/>
+                  </a:lnTo>
+                  <a:lnTo>
+                    <a:pt x="3151391" y="1816688"/>
+                  </a:lnTo>
+                  <a:lnTo>
+                    <a:pt x="3223013" y="1841984"/>
+                  </a:lnTo>
+                  <a:lnTo>
+                    <a:pt x="3294636" y="1866770"/>
+                  </a:lnTo>
+                  <a:lnTo>
+                    <a:pt x="3366258" y="1891059"/>
+                  </a:lnTo>
+                  <a:lnTo>
+                    <a:pt x="3437881" y="1914859"/>
+                  </a:lnTo>
+                  <a:lnTo>
+                    <a:pt x="3509503" y="1938181"/>
+                  </a:lnTo>
+                  <a:lnTo>
+                    <a:pt x="3581126" y="1961034"/>
+                  </a:lnTo>
+                  <a:lnTo>
+                    <a:pt x="3652748" y="1983427"/>
+                  </a:lnTo>
+                  <a:lnTo>
+                    <a:pt x="3724371" y="2005371"/>
+                  </a:lnTo>
+                  <a:lnTo>
+                    <a:pt x="3795993" y="2026873"/>
+                  </a:lnTo>
+                  <a:lnTo>
+                    <a:pt x="3867616" y="2047943"/>
+                  </a:lnTo>
+                  <a:lnTo>
+                    <a:pt x="3939238" y="2068589"/>
+                  </a:lnTo>
+                  <a:lnTo>
+                    <a:pt x="4010861" y="2088821"/>
+                  </a:lnTo>
+                  <a:lnTo>
+                    <a:pt x="4082483" y="2108645"/>
+                  </a:lnTo>
+                  <a:lnTo>
+                    <a:pt x="4154106" y="2128071"/>
+                  </a:lnTo>
+                  <a:lnTo>
+                    <a:pt x="4225729" y="2147107"/>
+                  </a:lnTo>
+                  <a:lnTo>
+                    <a:pt x="4297351" y="2165760"/>
+                  </a:lnTo>
+                  <a:lnTo>
+                    <a:pt x="4368974" y="2184037"/>
+                  </a:lnTo>
+                  <a:lnTo>
+                    <a:pt x="4440596" y="2201948"/>
+                  </a:lnTo>
+                  <a:lnTo>
+                    <a:pt x="4512219" y="2219498"/>
+                  </a:lnTo>
+                  <a:lnTo>
+                    <a:pt x="4583841" y="2236696"/>
+                  </a:lnTo>
+                  <a:lnTo>
+                    <a:pt x="4655464" y="2244744"/>
+                  </a:lnTo>
+                  <a:lnTo>
+                    <a:pt x="4727086" y="2243167"/>
+                  </a:lnTo>
+                  <a:lnTo>
+                    <a:pt x="4798709" y="2241586"/>
+                  </a:lnTo>
+                  <a:lnTo>
+                    <a:pt x="4870331" y="2240003"/>
+                  </a:lnTo>
+                  <a:lnTo>
+                    <a:pt x="4941954" y="2238417"/>
+                  </a:lnTo>
+                  <a:lnTo>
+                    <a:pt x="5013576" y="2236827"/>
+                  </a:lnTo>
+                  <a:lnTo>
+                    <a:pt x="5085199" y="2235235"/>
+                  </a:lnTo>
+                  <a:lnTo>
+                    <a:pt x="5156821" y="2233640"/>
+                  </a:lnTo>
+                  <a:lnTo>
+                    <a:pt x="5228444" y="2232041"/>
+                  </a:lnTo>
+                  <a:lnTo>
+                    <a:pt x="5300066" y="2230440"/>
+                  </a:lnTo>
+                  <a:lnTo>
+                    <a:pt x="5371689" y="2228835"/>
+                  </a:lnTo>
+                  <a:lnTo>
+                    <a:pt x="5443311" y="2227228"/>
+                  </a:lnTo>
+                  <a:lnTo>
+                    <a:pt x="5514934" y="2225617"/>
+                  </a:lnTo>
+                  <a:lnTo>
+                    <a:pt x="5586557" y="2224003"/>
+                  </a:lnTo>
+                  <a:lnTo>
+                    <a:pt x="5658179" y="2222386"/>
+                  </a:lnTo>
+                  <a:lnTo>
+                    <a:pt x="5729802" y="2220767"/>
+                  </a:lnTo>
+                  <a:lnTo>
+                    <a:pt x="5801424" y="2219144"/>
+                  </a:lnTo>
+                  <a:lnTo>
+                    <a:pt x="5873047" y="2217518"/>
+                  </a:lnTo>
+                  <a:lnTo>
+                    <a:pt x="5944669" y="2215889"/>
+                  </a:lnTo>
+                  <a:lnTo>
+                    <a:pt x="6016292" y="2214257"/>
+                  </a:lnTo>
+                  <a:lnTo>
+                    <a:pt x="6087914" y="2212621"/>
+                  </a:lnTo>
+                  <a:lnTo>
+                    <a:pt x="6159537" y="2210983"/>
+                  </a:lnTo>
+                  <a:lnTo>
+                    <a:pt x="6231159" y="2209341"/>
+                  </a:lnTo>
+                  <a:lnTo>
+                    <a:pt x="6302782" y="2207697"/>
+                  </a:lnTo>
+                  <a:lnTo>
+                    <a:pt x="6374404" y="2206049"/>
+                  </a:lnTo>
+                  <a:lnTo>
+                    <a:pt x="6446027" y="2204398"/>
+                  </a:lnTo>
+                  <a:lnTo>
+                    <a:pt x="6517649" y="2202744"/>
+                  </a:lnTo>
+                  <a:lnTo>
+                    <a:pt x="6589272" y="2201087"/>
+                  </a:lnTo>
+                  <a:lnTo>
+                    <a:pt x="6660894" y="2199427"/>
+                  </a:lnTo>
+                  <a:lnTo>
+                    <a:pt x="6732517" y="2197763"/>
+                  </a:lnTo>
+                  <a:lnTo>
+                    <a:pt x="6804139" y="2196097"/>
+                  </a:lnTo>
+                  <a:lnTo>
+                    <a:pt x="6875762" y="2194427"/>
+                  </a:lnTo>
+                  <a:lnTo>
+                    <a:pt x="6947385" y="2192754"/>
+                  </a:lnTo>
+                  <a:lnTo>
+                    <a:pt x="7019007" y="2191078"/>
+                  </a:lnTo>
+                  <a:lnTo>
+                    <a:pt x="7090630" y="2189399"/>
+                  </a:lnTo>
+                  <a:lnTo>
+                    <a:pt x="7090630" y="2663155"/>
+                  </a:lnTo>
+                  <a:lnTo>
+                    <a:pt x="7019007" y="2654707"/>
+                  </a:lnTo>
+                  <a:lnTo>
+                    <a:pt x="6947385" y="2646085"/>
+                  </a:lnTo>
+                  <a:lnTo>
+                    <a:pt x="6875762" y="2637286"/>
+                  </a:lnTo>
+                  <a:lnTo>
+                    <a:pt x="6804139" y="2628307"/>
+                  </a:lnTo>
+                  <a:lnTo>
+                    <a:pt x="6732517" y="2619144"/>
+                  </a:lnTo>
+                  <a:lnTo>
+                    <a:pt x="6660894" y="2609792"/>
+                  </a:lnTo>
+                  <a:lnTo>
+                    <a:pt x="6589272" y="2600249"/>
+                  </a:lnTo>
+                  <a:lnTo>
+                    <a:pt x="6517649" y="2590510"/>
+                  </a:lnTo>
+                  <a:lnTo>
+                    <a:pt x="6446027" y="2580571"/>
+                  </a:lnTo>
+                  <a:lnTo>
+                    <a:pt x="6374404" y="2570428"/>
+                  </a:lnTo>
+                  <a:lnTo>
+                    <a:pt x="6302782" y="2560077"/>
+                  </a:lnTo>
+                  <a:lnTo>
+                    <a:pt x="6231159" y="2549514"/>
+                  </a:lnTo>
+                  <a:lnTo>
+                    <a:pt x="6159537" y="2538734"/>
+                  </a:lnTo>
+                  <a:lnTo>
+                    <a:pt x="6087914" y="2527733"/>
+                  </a:lnTo>
+                  <a:lnTo>
+                    <a:pt x="6016292" y="2516507"/>
+                  </a:lnTo>
+                  <a:lnTo>
+                    <a:pt x="5944669" y="2505049"/>
+                  </a:lnTo>
+                  <a:lnTo>
+                    <a:pt x="5873047" y="2493357"/>
+                  </a:lnTo>
+                  <a:lnTo>
+                    <a:pt x="5801424" y="2481425"/>
+                  </a:lnTo>
+                  <a:lnTo>
+                    <a:pt x="5729802" y="2469249"/>
+                  </a:lnTo>
+                  <a:lnTo>
+                    <a:pt x="5658179" y="2456822"/>
+                  </a:lnTo>
+                  <a:lnTo>
+                    <a:pt x="5586557" y="2444140"/>
+                  </a:lnTo>
+                  <a:lnTo>
+                    <a:pt x="5514934" y="2431199"/>
+                  </a:lnTo>
+                  <a:lnTo>
+                    <a:pt x="5443311" y="2417991"/>
+                  </a:lnTo>
+                  <a:lnTo>
+                    <a:pt x="5371689" y="2404513"/>
+                  </a:lnTo>
+                  <a:lnTo>
+                    <a:pt x="5300066" y="2390759"/>
+                  </a:lnTo>
+                  <a:lnTo>
+                    <a:pt x="5228444" y="2376722"/>
+                  </a:lnTo>
+                  <a:lnTo>
+                    <a:pt x="5156821" y="2362397"/>
+                  </a:lnTo>
+                  <a:lnTo>
+                    <a:pt x="5085199" y="2347778"/>
+                  </a:lnTo>
+                  <a:lnTo>
+                    <a:pt x="5013576" y="2332859"/>
+                  </a:lnTo>
+                  <a:lnTo>
+                    <a:pt x="4941954" y="2317635"/>
+                  </a:lnTo>
+                  <a:lnTo>
+                    <a:pt x="4870331" y="2302098"/>
+                  </a:lnTo>
+                  <a:lnTo>
+                    <a:pt x="4798709" y="2286242"/>
+                  </a:lnTo>
+                  <a:lnTo>
+                    <a:pt x="4727086" y="2270061"/>
+                  </a:lnTo>
+                  <a:lnTo>
+                    <a:pt x="4655464" y="2253548"/>
+                  </a:lnTo>
+                  <a:lnTo>
+                    <a:pt x="4583841" y="2246318"/>
+                  </a:lnTo>
+                  <a:lnTo>
+                    <a:pt x="4512219" y="2247890"/>
+                  </a:lnTo>
+                  <a:lnTo>
+                    <a:pt x="4440596" y="2249458"/>
+                  </a:lnTo>
+                  <a:lnTo>
+                    <a:pt x="4368974" y="2251024"/>
+                  </a:lnTo>
+                  <a:lnTo>
+                    <a:pt x="4297351" y="2252586"/>
+                  </a:lnTo>
+                  <a:lnTo>
+                    <a:pt x="4225729" y="2254146"/>
+                  </a:lnTo>
+                  <a:lnTo>
+                    <a:pt x="4154106" y="2255702"/>
+                  </a:lnTo>
+                  <a:lnTo>
+                    <a:pt x="4082483" y="2257256"/>
+                  </a:lnTo>
+                  <a:lnTo>
+                    <a:pt x="4010861" y="2258806"/>
+                  </a:lnTo>
+                  <a:lnTo>
+                    <a:pt x="3939238" y="2260354"/>
+                  </a:lnTo>
+                  <a:lnTo>
+                    <a:pt x="3867616" y="2261899"/>
+                  </a:lnTo>
+                  <a:lnTo>
+                    <a:pt x="3795993" y="2263441"/>
+                  </a:lnTo>
+                  <a:lnTo>
+                    <a:pt x="3724371" y="2264980"/>
+                  </a:lnTo>
+                  <a:lnTo>
+                    <a:pt x="3652748" y="2266515"/>
+                  </a:lnTo>
+                  <a:lnTo>
+                    <a:pt x="3581126" y="2268049"/>
+                  </a:lnTo>
+                  <a:lnTo>
+                    <a:pt x="3509503" y="2269579"/>
+                  </a:lnTo>
+                  <a:lnTo>
+                    <a:pt x="3437881" y="2271106"/>
+                  </a:lnTo>
+                  <a:lnTo>
+                    <a:pt x="3366258" y="2272630"/>
+                  </a:lnTo>
+                  <a:lnTo>
+                    <a:pt x="3294636" y="2274152"/>
+                  </a:lnTo>
+                  <a:lnTo>
+                    <a:pt x="3223013" y="2275670"/>
+                  </a:lnTo>
+                  <a:lnTo>
+                    <a:pt x="3151391" y="2277186"/>
+                  </a:lnTo>
+                  <a:lnTo>
+                    <a:pt x="3079768" y="2278699"/>
+                  </a:lnTo>
+                  <a:lnTo>
+                    <a:pt x="3008146" y="2280209"/>
+                  </a:lnTo>
+                  <a:lnTo>
+                    <a:pt x="2936523" y="2281716"/>
+                  </a:lnTo>
+                  <a:lnTo>
+                    <a:pt x="2864901" y="2283220"/>
+                  </a:lnTo>
+                  <a:lnTo>
+                    <a:pt x="2793278" y="2284722"/>
+                  </a:lnTo>
+                  <a:lnTo>
+                    <a:pt x="2721655" y="2286220"/>
+                  </a:lnTo>
+                  <a:lnTo>
+                    <a:pt x="2650033" y="2287716"/>
+                  </a:lnTo>
+                  <a:lnTo>
+                    <a:pt x="2578410" y="2289209"/>
+                  </a:lnTo>
+                  <a:lnTo>
+                    <a:pt x="2506788" y="2290699"/>
+                  </a:lnTo>
+                  <a:lnTo>
+                    <a:pt x="2435165" y="2292186"/>
+                  </a:lnTo>
+                  <a:lnTo>
+                    <a:pt x="2363543" y="2293670"/>
+                  </a:lnTo>
+                  <a:lnTo>
+                    <a:pt x="2291920" y="2295152"/>
+                  </a:lnTo>
+                  <a:lnTo>
+                    <a:pt x="2220298" y="2296631"/>
+                  </a:lnTo>
+                  <a:lnTo>
+                    <a:pt x="2148675" y="2298107"/>
+                  </a:lnTo>
+                  <a:lnTo>
+                    <a:pt x="2077053" y="2299580"/>
+                  </a:lnTo>
+                  <a:lnTo>
+                    <a:pt x="2005430" y="2301050"/>
+                  </a:lnTo>
+                  <a:lnTo>
+                    <a:pt x="1933808" y="2302518"/>
+                  </a:lnTo>
+                  <a:lnTo>
+                    <a:pt x="1862185" y="2303983"/>
+                  </a:lnTo>
+                  <a:lnTo>
+                    <a:pt x="1790563" y="2305445"/>
+                  </a:lnTo>
+                  <a:lnTo>
+                    <a:pt x="1718940" y="2306904"/>
+                  </a:lnTo>
+                  <a:lnTo>
+                    <a:pt x="1647318" y="2308360"/>
+                  </a:lnTo>
+                  <a:lnTo>
+                    <a:pt x="1575695" y="2309814"/>
+                  </a:lnTo>
+                  <a:lnTo>
+                    <a:pt x="1504073" y="2311265"/>
+                  </a:lnTo>
+                  <a:lnTo>
+                    <a:pt x="1432450" y="2312713"/>
+                  </a:lnTo>
+                  <a:lnTo>
+                    <a:pt x="1360827" y="2314159"/>
+                  </a:lnTo>
+                  <a:lnTo>
+                    <a:pt x="1289205" y="2315601"/>
+                  </a:lnTo>
+                  <a:lnTo>
+                    <a:pt x="1217582" y="2317041"/>
+                  </a:lnTo>
+                  <a:lnTo>
+                    <a:pt x="1145960" y="2318479"/>
+                  </a:lnTo>
+                  <a:lnTo>
+                    <a:pt x="1074337" y="2319913"/>
+                  </a:lnTo>
+                  <a:lnTo>
+                    <a:pt x="1002715" y="2321345"/>
+                  </a:lnTo>
+                  <a:lnTo>
+                    <a:pt x="931092" y="2322774"/>
+                  </a:lnTo>
+                  <a:lnTo>
+                    <a:pt x="859470" y="2324201"/>
+                  </a:lnTo>
+                  <a:lnTo>
+                    <a:pt x="787847" y="2325624"/>
+                  </a:lnTo>
+                  <a:lnTo>
+                    <a:pt x="716225" y="2327045"/>
+                  </a:lnTo>
+                  <a:lnTo>
+                    <a:pt x="644602" y="2328463"/>
+                  </a:lnTo>
+                  <a:lnTo>
+                    <a:pt x="572980" y="2329879"/>
+                  </a:lnTo>
+                  <a:lnTo>
+                    <a:pt x="501357" y="2331292"/>
+                  </a:lnTo>
+                  <a:lnTo>
+                    <a:pt x="429735" y="2332702"/>
+                  </a:lnTo>
+                  <a:lnTo>
+                    <a:pt x="358112" y="2334110"/>
+                  </a:lnTo>
+                  <a:lnTo>
+                    <a:pt x="286490" y="2335515"/>
+                  </a:lnTo>
+                  <a:lnTo>
+                    <a:pt x="214867" y="2336917"/>
+                  </a:lnTo>
+                  <a:lnTo>
+                    <a:pt x="143245" y="2338316"/>
+                  </a:lnTo>
+                  <a:lnTo>
+                    <a:pt x="71622" y="2339713"/>
+                  </a:lnTo>
+                  <a:lnTo>
+                    <a:pt x="0" y="2341108"/>
                   </a:lnTo>
                   <a:close/>
                 </a:path>
@@ -3547,312 +3547,312 @@
           </p:nvSpPr>
           <p:spPr>
             <a:xfrm>
-              <a:off x="1172049" y="2600126"/>
-              <a:ext cx="7090630" cy="2126420"/>
+              <a:off x="1172049" y="2482285"/>
+              <a:ext cx="7090630" cy="2244744"/>
             </a:xfrm>
             <a:custGeom>
               <a:avLst/>
               <a:pathLst>
-                <a:path w="7090630" h="2126420">
+                <a:path w="7090630" h="2244744">
                   <a:moveTo>
                     <a:pt x="0" y="0"/>
                   </a:moveTo>
                   <a:lnTo>
-                    <a:pt x="71622" y="57807"/>
-                  </a:lnTo>
-                  <a:lnTo>
-                    <a:pt x="143245" y="114485"/>
-                  </a:lnTo>
-                  <a:lnTo>
-                    <a:pt x="214867" y="170055"/>
-                  </a:lnTo>
-                  <a:lnTo>
-                    <a:pt x="286490" y="224538"/>
-                  </a:lnTo>
-                  <a:lnTo>
-                    <a:pt x="358112" y="277956"/>
-                  </a:lnTo>
-                  <a:lnTo>
-                    <a:pt x="429735" y="330330"/>
-                  </a:lnTo>
-                  <a:lnTo>
-                    <a:pt x="501357" y="381681"/>
-                  </a:lnTo>
-                  <a:lnTo>
-                    <a:pt x="572980" y="432027"/>
-                  </a:lnTo>
-                  <a:lnTo>
-                    <a:pt x="644602" y="481389"/>
-                  </a:lnTo>
-                  <a:lnTo>
-                    <a:pt x="716225" y="529786"/>
-                  </a:lnTo>
-                  <a:lnTo>
-                    <a:pt x="787847" y="577237"/>
-                  </a:lnTo>
-                  <a:lnTo>
-                    <a:pt x="859470" y="623761"/>
-                  </a:lnTo>
-                  <a:lnTo>
-                    <a:pt x="931092" y="669375"/>
-                  </a:lnTo>
-                  <a:lnTo>
-                    <a:pt x="1002715" y="714097"/>
-                  </a:lnTo>
-                  <a:lnTo>
-                    <a:pt x="1074337" y="757945"/>
-                  </a:lnTo>
-                  <a:lnTo>
-                    <a:pt x="1145960" y="800936"/>
-                  </a:lnTo>
-                  <a:lnTo>
-                    <a:pt x="1217582" y="843087"/>
-                  </a:lnTo>
-                  <a:lnTo>
-                    <a:pt x="1289205" y="884413"/>
-                  </a:lnTo>
-                  <a:lnTo>
-                    <a:pt x="1360827" y="924932"/>
-                  </a:lnTo>
-                  <a:lnTo>
-                    <a:pt x="1432450" y="964659"/>
-                  </a:lnTo>
-                  <a:lnTo>
-                    <a:pt x="1504073" y="1003609"/>
-                  </a:lnTo>
-                  <a:lnTo>
-                    <a:pt x="1575695" y="1041797"/>
-                  </a:lnTo>
-                  <a:lnTo>
-                    <a:pt x="1647318" y="1079239"/>
-                  </a:lnTo>
-                  <a:lnTo>
-                    <a:pt x="1718940" y="1115949"/>
-                  </a:lnTo>
-                  <a:lnTo>
-                    <a:pt x="1790563" y="1151942"/>
-                  </a:lnTo>
-                  <a:lnTo>
-                    <a:pt x="1862185" y="1187230"/>
-                  </a:lnTo>
-                  <a:lnTo>
-                    <a:pt x="1933808" y="1221829"/>
-                  </a:lnTo>
-                  <a:lnTo>
-                    <a:pt x="2005430" y="1255752"/>
-                  </a:lnTo>
-                  <a:lnTo>
-                    <a:pt x="2077053" y="1289011"/>
-                  </a:lnTo>
-                  <a:lnTo>
-                    <a:pt x="2148675" y="1321621"/>
-                  </a:lnTo>
-                  <a:lnTo>
-                    <a:pt x="2220298" y="1353593"/>
-                  </a:lnTo>
-                  <a:lnTo>
-                    <a:pt x="2291920" y="1384939"/>
-                  </a:lnTo>
-                  <a:lnTo>
-                    <a:pt x="2363543" y="1415673"/>
-                  </a:lnTo>
-                  <a:lnTo>
-                    <a:pt x="2435165" y="1445807"/>
-                  </a:lnTo>
-                  <a:lnTo>
-                    <a:pt x="2506788" y="1475351"/>
-                  </a:lnTo>
-                  <a:lnTo>
-                    <a:pt x="2578410" y="1504317"/>
-                  </a:lnTo>
-                  <a:lnTo>
-                    <a:pt x="2650033" y="1532718"/>
-                  </a:lnTo>
-                  <a:lnTo>
-                    <a:pt x="2721655" y="1560563"/>
-                  </a:lnTo>
-                  <a:lnTo>
-                    <a:pt x="2793278" y="1587864"/>
-                  </a:lnTo>
-                  <a:lnTo>
-                    <a:pt x="2864901" y="1614631"/>
-                  </a:lnTo>
-                  <a:lnTo>
-                    <a:pt x="2936523" y="1640875"/>
-                  </a:lnTo>
-                  <a:lnTo>
-                    <a:pt x="3008146" y="1666606"/>
-                  </a:lnTo>
-                  <a:lnTo>
-                    <a:pt x="3079768" y="1691834"/>
-                  </a:lnTo>
-                  <a:lnTo>
-                    <a:pt x="3151391" y="1716568"/>
-                  </a:lnTo>
-                  <a:lnTo>
-                    <a:pt x="3223013" y="1740819"/>
-                  </a:lnTo>
-                  <a:lnTo>
-                    <a:pt x="3294636" y="1764596"/>
-                  </a:lnTo>
-                  <a:lnTo>
-                    <a:pt x="3366258" y="1787909"/>
-                  </a:lnTo>
-                  <a:lnTo>
-                    <a:pt x="3437881" y="1810765"/>
-                  </a:lnTo>
-                  <a:lnTo>
-                    <a:pt x="3509503" y="1833175"/>
-                  </a:lnTo>
-                  <a:lnTo>
-                    <a:pt x="3581126" y="1855147"/>
-                  </a:lnTo>
-                  <a:lnTo>
-                    <a:pt x="3652748" y="1876689"/>
-                  </a:lnTo>
-                  <a:lnTo>
-                    <a:pt x="3724371" y="1897810"/>
-                  </a:lnTo>
-                  <a:lnTo>
-                    <a:pt x="3795993" y="1918518"/>
-                  </a:lnTo>
-                  <a:lnTo>
-                    <a:pt x="3867616" y="1938821"/>
-                  </a:lnTo>
-                  <a:lnTo>
-                    <a:pt x="3939238" y="1958728"/>
-                  </a:lnTo>
-                  <a:lnTo>
-                    <a:pt x="4010861" y="1978245"/>
-                  </a:lnTo>
-                  <a:lnTo>
-                    <a:pt x="4082483" y="1997381"/>
-                  </a:lnTo>
-                  <a:lnTo>
-                    <a:pt x="4154106" y="2016142"/>
-                  </a:lnTo>
-                  <a:lnTo>
-                    <a:pt x="4225729" y="2034537"/>
-                  </a:lnTo>
-                  <a:lnTo>
-                    <a:pt x="4297351" y="2052572"/>
-                  </a:lnTo>
-                  <a:lnTo>
-                    <a:pt x="4368974" y="2070255"/>
-                  </a:lnTo>
-                  <a:lnTo>
-                    <a:pt x="4440596" y="2087592"/>
-                  </a:lnTo>
-                  <a:lnTo>
-                    <a:pt x="4512219" y="2104590"/>
-                  </a:lnTo>
-                  <a:lnTo>
-                    <a:pt x="4583841" y="2121256"/>
-                  </a:lnTo>
-                  <a:lnTo>
-                    <a:pt x="4655464" y="2126420"/>
-                  </a:lnTo>
-                  <a:lnTo>
-                    <a:pt x="4727086" y="2124386"/>
-                  </a:lnTo>
-                  <a:lnTo>
-                    <a:pt x="4798709" y="2122347"/>
-                  </a:lnTo>
-                  <a:lnTo>
-                    <a:pt x="4870331" y="2120302"/>
-                  </a:lnTo>
-                  <a:lnTo>
-                    <a:pt x="4941954" y="2118253"/>
-                  </a:lnTo>
-                  <a:lnTo>
-                    <a:pt x="5013576" y="2116199"/>
-                  </a:lnTo>
-                  <a:lnTo>
-                    <a:pt x="5085199" y="2114140"/>
-                  </a:lnTo>
-                  <a:lnTo>
-                    <a:pt x="5156821" y="2112075"/>
-                  </a:lnTo>
-                  <a:lnTo>
-                    <a:pt x="5228444" y="2110006"/>
-                  </a:lnTo>
-                  <a:lnTo>
-                    <a:pt x="5300066" y="2107932"/>
-                  </a:lnTo>
-                  <a:lnTo>
-                    <a:pt x="5371689" y="2105852"/>
-                  </a:lnTo>
-                  <a:lnTo>
-                    <a:pt x="5443311" y="2103767"/>
-                  </a:lnTo>
-                  <a:lnTo>
-                    <a:pt x="5514934" y="2101678"/>
-                  </a:lnTo>
-                  <a:lnTo>
-                    <a:pt x="5586557" y="2099583"/>
-                  </a:lnTo>
-                  <a:lnTo>
-                    <a:pt x="5658179" y="2097483"/>
-                  </a:lnTo>
-                  <a:lnTo>
-                    <a:pt x="5729802" y="2095378"/>
-                  </a:lnTo>
-                  <a:lnTo>
-                    <a:pt x="5801424" y="2093268"/>
-                  </a:lnTo>
-                  <a:lnTo>
-                    <a:pt x="5873047" y="2091152"/>
-                  </a:lnTo>
-                  <a:lnTo>
-                    <a:pt x="5944669" y="2089032"/>
-                  </a:lnTo>
-                  <a:lnTo>
-                    <a:pt x="6016292" y="2086906"/>
-                  </a:lnTo>
-                  <a:lnTo>
-                    <a:pt x="6087914" y="2084775"/>
-                  </a:lnTo>
-                  <a:lnTo>
-                    <a:pt x="6159537" y="2082639"/>
-                  </a:lnTo>
-                  <a:lnTo>
-                    <a:pt x="6231159" y="2080497"/>
-                  </a:lnTo>
-                  <a:lnTo>
-                    <a:pt x="6302782" y="2078351"/>
-                  </a:lnTo>
-                  <a:lnTo>
-                    <a:pt x="6374404" y="2076199"/>
-                  </a:lnTo>
-                  <a:lnTo>
-                    <a:pt x="6446027" y="2074041"/>
-                  </a:lnTo>
-                  <a:lnTo>
-                    <a:pt x="6517649" y="2071879"/>
-                  </a:lnTo>
-                  <a:lnTo>
-                    <a:pt x="6589272" y="2069711"/>
-                  </a:lnTo>
-                  <a:lnTo>
-                    <a:pt x="6660894" y="2067538"/>
-                  </a:lnTo>
-                  <a:lnTo>
-                    <a:pt x="6732517" y="2065360"/>
-                  </a:lnTo>
-                  <a:lnTo>
-                    <a:pt x="6804139" y="2063176"/>
-                  </a:lnTo>
-                  <a:lnTo>
-                    <a:pt x="6875762" y="2060987"/>
-                  </a:lnTo>
-                  <a:lnTo>
-                    <a:pt x="6947385" y="2058792"/>
-                  </a:lnTo>
-                  <a:lnTo>
-                    <a:pt x="7019007" y="2056592"/>
-                  </a:lnTo>
-                  <a:lnTo>
-                    <a:pt x="7090630" y="2054387"/>
+                    <a:pt x="71622" y="61816"/>
+                  </a:lnTo>
+                  <a:lnTo>
+                    <a:pt x="143245" y="122390"/>
+                  </a:lnTo>
+                  <a:lnTo>
+                    <a:pt x="214867" y="181746"/>
+                  </a:lnTo>
+                  <a:lnTo>
+                    <a:pt x="286490" y="239909"/>
+                  </a:lnTo>
+                  <a:lnTo>
+                    <a:pt x="358112" y="296902"/>
+                  </a:lnTo>
+                  <a:lnTo>
+                    <a:pt x="429735" y="352750"/>
+                  </a:lnTo>
+                  <a:lnTo>
+                    <a:pt x="501357" y="407475"/>
+                  </a:lnTo>
+                  <a:lnTo>
+                    <a:pt x="572980" y="461100"/>
+                  </a:lnTo>
+                  <a:lnTo>
+                    <a:pt x="644602" y="513647"/>
+                  </a:lnTo>
+                  <a:lnTo>
+                    <a:pt x="716225" y="565138"/>
+                  </a:lnTo>
+                  <a:lnTo>
+                    <a:pt x="787847" y="615593"/>
+                  </a:lnTo>
+                  <a:lnTo>
+                    <a:pt x="859470" y="665034"/>
+                  </a:lnTo>
+                  <a:lnTo>
+                    <a:pt x="931092" y="713481"/>
+                  </a:lnTo>
+                  <a:lnTo>
+                    <a:pt x="1002715" y="760955"/>
+                  </a:lnTo>
+                  <a:lnTo>
+                    <a:pt x="1074337" y="807474"/>
+                  </a:lnTo>
+                  <a:lnTo>
+                    <a:pt x="1145960" y="853057"/>
+                  </a:lnTo>
+                  <a:lnTo>
+                    <a:pt x="1217582" y="897725"/>
+                  </a:lnTo>
+                  <a:lnTo>
+                    <a:pt x="1289205" y="941494"/>
+                  </a:lnTo>
+                  <a:lnTo>
+                    <a:pt x="1360827" y="984384"/>
+                  </a:lnTo>
+                  <a:lnTo>
+                    <a:pt x="1432450" y="1026411"/>
+                  </a:lnTo>
+                  <a:lnTo>
+                    <a:pt x="1504073" y="1067593"/>
+                  </a:lnTo>
+                  <a:lnTo>
+                    <a:pt x="1575695" y="1107948"/>
+                  </a:lnTo>
+                  <a:lnTo>
+                    <a:pt x="1647318" y="1147491"/>
+                  </a:lnTo>
+                  <a:lnTo>
+                    <a:pt x="1718940" y="1186239"/>
+                  </a:lnTo>
+                  <a:lnTo>
+                    <a:pt x="1790563" y="1224209"/>
+                  </a:lnTo>
+                  <a:lnTo>
+                    <a:pt x="1862185" y="1261415"/>
+                  </a:lnTo>
+                  <a:lnTo>
+                    <a:pt x="1933808" y="1297873"/>
+                  </a:lnTo>
+                  <a:lnTo>
+                    <a:pt x="2005430" y="1333598"/>
+                  </a:lnTo>
+                  <a:lnTo>
+                    <a:pt x="2077053" y="1368605"/>
+                  </a:lnTo>
+                  <a:lnTo>
+                    <a:pt x="2148675" y="1402908"/>
+                  </a:lnTo>
+                  <a:lnTo>
+                    <a:pt x="2220298" y="1436522"/>
+                  </a:lnTo>
+                  <a:lnTo>
+                    <a:pt x="2291920" y="1469460"/>
+                  </a:lnTo>
+                  <a:lnTo>
+                    <a:pt x="2363543" y="1501735"/>
+                  </a:lnTo>
+                  <a:lnTo>
+                    <a:pt x="2435165" y="1533362"/>
+                  </a:lnTo>
+                  <a:lnTo>
+                    <a:pt x="2506788" y="1564353"/>
+                  </a:lnTo>
+                  <a:lnTo>
+                    <a:pt x="2578410" y="1594721"/>
+                  </a:lnTo>
+                  <a:lnTo>
+                    <a:pt x="2650033" y="1624479"/>
+                  </a:lnTo>
+                  <a:lnTo>
+                    <a:pt x="2721655" y="1653638"/>
+                  </a:lnTo>
+                  <a:lnTo>
+                    <a:pt x="2793278" y="1682211"/>
+                  </a:lnTo>
+                  <a:lnTo>
+                    <a:pt x="2864901" y="1710210"/>
+                  </a:lnTo>
+                  <a:lnTo>
+                    <a:pt x="2936523" y="1737646"/>
+                  </a:lnTo>
+                  <a:lnTo>
+                    <a:pt x="3008146" y="1764530"/>
+                  </a:lnTo>
+                  <a:lnTo>
+                    <a:pt x="3079768" y="1790874"/>
+                  </a:lnTo>
+                  <a:lnTo>
+                    <a:pt x="3151391" y="1816688"/>
+                  </a:lnTo>
+                  <a:lnTo>
+                    <a:pt x="3223013" y="1841984"/>
+                  </a:lnTo>
+                  <a:lnTo>
+                    <a:pt x="3294636" y="1866770"/>
+                  </a:lnTo>
+                  <a:lnTo>
+                    <a:pt x="3366258" y="1891059"/>
+                  </a:lnTo>
+                  <a:lnTo>
+                    <a:pt x="3437881" y="1914859"/>
+                  </a:lnTo>
+                  <a:lnTo>
+                    <a:pt x="3509503" y="1938181"/>
+                  </a:lnTo>
+                  <a:lnTo>
+                    <a:pt x="3581126" y="1961034"/>
+                  </a:lnTo>
+                  <a:lnTo>
+                    <a:pt x="3652748" y="1983427"/>
+                  </a:lnTo>
+                  <a:lnTo>
+                    <a:pt x="3724371" y="2005371"/>
+                  </a:lnTo>
+                  <a:lnTo>
+                    <a:pt x="3795993" y="2026873"/>
+                  </a:lnTo>
+                  <a:lnTo>
+                    <a:pt x="3867616" y="2047943"/>
+                  </a:lnTo>
+                  <a:lnTo>
+                    <a:pt x="3939238" y="2068589"/>
+                  </a:lnTo>
+                  <a:lnTo>
+                    <a:pt x="4010861" y="2088821"/>
+                  </a:lnTo>
+                  <a:lnTo>
+                    <a:pt x="4082483" y="2108645"/>
+                  </a:lnTo>
+                  <a:lnTo>
+                    <a:pt x="4154106" y="2128071"/>
+                  </a:lnTo>
+                  <a:lnTo>
+                    <a:pt x="4225729" y="2147107"/>
+                  </a:lnTo>
+                  <a:lnTo>
+                    <a:pt x="4297351" y="2165760"/>
+                  </a:lnTo>
+                  <a:lnTo>
+                    <a:pt x="4368974" y="2184037"/>
+                  </a:lnTo>
+                  <a:lnTo>
+                    <a:pt x="4440596" y="2201948"/>
+                  </a:lnTo>
+                  <a:lnTo>
+                    <a:pt x="4512219" y="2219498"/>
+                  </a:lnTo>
+                  <a:lnTo>
+                    <a:pt x="4583841" y="2236696"/>
+                  </a:lnTo>
+                  <a:lnTo>
+                    <a:pt x="4655464" y="2244744"/>
+                  </a:lnTo>
+                  <a:lnTo>
+                    <a:pt x="4727086" y="2243167"/>
+                  </a:lnTo>
+                  <a:lnTo>
+                    <a:pt x="4798709" y="2241586"/>
+                  </a:lnTo>
+                  <a:lnTo>
+                    <a:pt x="4870331" y="2240003"/>
+                  </a:lnTo>
+                  <a:lnTo>
+                    <a:pt x="4941954" y="2238417"/>
+                  </a:lnTo>
+                  <a:lnTo>
+                    <a:pt x="5013576" y="2236827"/>
+                  </a:lnTo>
+                  <a:lnTo>
+                    <a:pt x="5085199" y="2235235"/>
+                  </a:lnTo>
+                  <a:lnTo>
+                    <a:pt x="5156821" y="2233640"/>
+                  </a:lnTo>
+                  <a:lnTo>
+                    <a:pt x="5228444" y="2232041"/>
+                  </a:lnTo>
+                  <a:lnTo>
+                    <a:pt x="5300066" y="2230440"/>
+                  </a:lnTo>
+                  <a:lnTo>
+                    <a:pt x="5371689" y="2228835"/>
+                  </a:lnTo>
+                  <a:lnTo>
+                    <a:pt x="5443311" y="2227228"/>
+                  </a:lnTo>
+                  <a:lnTo>
+                    <a:pt x="5514934" y="2225617"/>
+                  </a:lnTo>
+                  <a:lnTo>
+                    <a:pt x="5586557" y="2224003"/>
+                  </a:lnTo>
+                  <a:lnTo>
+                    <a:pt x="5658179" y="2222386"/>
+                  </a:lnTo>
+                  <a:lnTo>
+                    <a:pt x="5729802" y="2220767"/>
+                  </a:lnTo>
+                  <a:lnTo>
+                    <a:pt x="5801424" y="2219144"/>
+                  </a:lnTo>
+                  <a:lnTo>
+                    <a:pt x="5873047" y="2217518"/>
+                  </a:lnTo>
+                  <a:lnTo>
+                    <a:pt x="5944669" y="2215889"/>
+                  </a:lnTo>
+                  <a:lnTo>
+                    <a:pt x="6016292" y="2214257"/>
+                  </a:lnTo>
+                  <a:lnTo>
+                    <a:pt x="6087914" y="2212621"/>
+                  </a:lnTo>
+                  <a:lnTo>
+                    <a:pt x="6159537" y="2210983"/>
+                  </a:lnTo>
+                  <a:lnTo>
+                    <a:pt x="6231159" y="2209341"/>
+                  </a:lnTo>
+                  <a:lnTo>
+                    <a:pt x="6302782" y="2207697"/>
+                  </a:lnTo>
+                  <a:lnTo>
+                    <a:pt x="6374404" y="2206049"/>
+                  </a:lnTo>
+                  <a:lnTo>
+                    <a:pt x="6446027" y="2204398"/>
+                  </a:lnTo>
+                  <a:lnTo>
+                    <a:pt x="6517649" y="2202744"/>
+                  </a:lnTo>
+                  <a:lnTo>
+                    <a:pt x="6589272" y="2201087"/>
+                  </a:lnTo>
+                  <a:lnTo>
+                    <a:pt x="6660894" y="2199427"/>
+                  </a:lnTo>
+                  <a:lnTo>
+                    <a:pt x="6732517" y="2197763"/>
+                  </a:lnTo>
+                  <a:lnTo>
+                    <a:pt x="6804139" y="2196097"/>
+                  </a:lnTo>
+                  <a:lnTo>
+                    <a:pt x="6875762" y="2194427"/>
+                  </a:lnTo>
+                  <a:lnTo>
+                    <a:pt x="6947385" y="2192754"/>
+                  </a:lnTo>
+                  <a:lnTo>
+                    <a:pt x="7019007" y="2191078"/>
+                  </a:lnTo>
+                  <a:lnTo>
+                    <a:pt x="7090630" y="2189399"/>
                   </a:lnTo>
                 </a:path>
               </a:pathLst>
@@ -3872,312 +3872,312 @@
           </p:nvSpPr>
           <p:spPr>
             <a:xfrm>
-              <a:off x="1172049" y="4728576"/>
-              <a:ext cx="7090630" cy="409832"/>
+              <a:off x="1172049" y="4728604"/>
+              <a:ext cx="7090630" cy="416836"/>
             </a:xfrm>
             <a:custGeom>
               <a:avLst/>
               <a:pathLst>
-                <a:path w="7090630" h="409832">
+                <a:path w="7090630" h="416836">
                   <a:moveTo>
-                    <a:pt x="7090630" y="409832"/>
+                    <a:pt x="7090630" y="416836"/>
                   </a:moveTo>
                   <a:lnTo>
-                    <a:pt x="7019007" y="401481"/>
-                  </a:lnTo>
-                  <a:lnTo>
-                    <a:pt x="6947385" y="392964"/>
-                  </a:lnTo>
-                  <a:lnTo>
-                    <a:pt x="6875762" y="384277"/>
-                  </a:lnTo>
-                  <a:lnTo>
-                    <a:pt x="6804139" y="375416"/>
-                  </a:lnTo>
-                  <a:lnTo>
-                    <a:pt x="6732517" y="366379"/>
-                  </a:lnTo>
-                  <a:lnTo>
-                    <a:pt x="6660894" y="357161"/>
-                  </a:lnTo>
-                  <a:lnTo>
-                    <a:pt x="6589272" y="347760"/>
-                  </a:lnTo>
-                  <a:lnTo>
-                    <a:pt x="6517649" y="338172"/>
-                  </a:lnTo>
-                  <a:lnTo>
-                    <a:pt x="6446027" y="328392"/>
-                  </a:lnTo>
-                  <a:lnTo>
-                    <a:pt x="6374404" y="318417"/>
-                  </a:lnTo>
-                  <a:lnTo>
-                    <a:pt x="6302782" y="308243"/>
-                  </a:lnTo>
-                  <a:lnTo>
-                    <a:pt x="6231159" y="297867"/>
-                  </a:lnTo>
-                  <a:lnTo>
-                    <a:pt x="6159537" y="287283"/>
-                  </a:lnTo>
-                  <a:lnTo>
-                    <a:pt x="6087914" y="276489"/>
-                  </a:lnTo>
-                  <a:lnTo>
-                    <a:pt x="6016292" y="265479"/>
-                  </a:lnTo>
-                  <a:lnTo>
-                    <a:pt x="5944669" y="254250"/>
-                  </a:lnTo>
-                  <a:lnTo>
-                    <a:pt x="5873047" y="242797"/>
-                  </a:lnTo>
-                  <a:lnTo>
-                    <a:pt x="5801424" y="231115"/>
-                  </a:lnTo>
-                  <a:lnTo>
-                    <a:pt x="5729802" y="219201"/>
-                  </a:lnTo>
-                  <a:lnTo>
-                    <a:pt x="5658179" y="207049"/>
-                  </a:lnTo>
-                  <a:lnTo>
-                    <a:pt x="5586557" y="194655"/>
-                  </a:lnTo>
-                  <a:lnTo>
-                    <a:pt x="5514934" y="182014"/>
-                  </a:lnTo>
-                  <a:lnTo>
-                    <a:pt x="5443311" y="169120"/>
-                  </a:lnTo>
-                  <a:lnTo>
-                    <a:pt x="5371689" y="155970"/>
-                  </a:lnTo>
-                  <a:lnTo>
-                    <a:pt x="5300066" y="142557"/>
-                  </a:lnTo>
-                  <a:lnTo>
-                    <a:pt x="5228444" y="128877"/>
-                  </a:lnTo>
-                  <a:lnTo>
-                    <a:pt x="5156821" y="114924"/>
-                  </a:lnTo>
-                  <a:lnTo>
-                    <a:pt x="5085199" y="100693"/>
-                  </a:lnTo>
-                  <a:lnTo>
-                    <a:pt x="5013576" y="86179"/>
-                  </a:lnTo>
-                  <a:lnTo>
-                    <a:pt x="4941954" y="71374"/>
-                  </a:lnTo>
-                  <a:lnTo>
-                    <a:pt x="4870331" y="56275"/>
-                  </a:lnTo>
-                  <a:lnTo>
-                    <a:pt x="4798709" y="40875"/>
-                  </a:lnTo>
-                  <a:lnTo>
-                    <a:pt x="4727086" y="25167"/>
-                  </a:lnTo>
-                  <a:lnTo>
-                    <a:pt x="4655464" y="9147"/>
+                    <a:pt x="7019007" y="408388"/>
+                  </a:lnTo>
+                  <a:lnTo>
+                    <a:pt x="6947385" y="399766"/>
+                  </a:lnTo>
+                  <a:lnTo>
+                    <a:pt x="6875762" y="390967"/>
+                  </a:lnTo>
+                  <a:lnTo>
+                    <a:pt x="6804139" y="381988"/>
+                  </a:lnTo>
+                  <a:lnTo>
+                    <a:pt x="6732517" y="372825"/>
+                  </a:lnTo>
+                  <a:lnTo>
+                    <a:pt x="6660894" y="363473"/>
+                  </a:lnTo>
+                  <a:lnTo>
+                    <a:pt x="6589272" y="353930"/>
+                  </a:lnTo>
+                  <a:lnTo>
+                    <a:pt x="6517649" y="344191"/>
+                  </a:lnTo>
+                  <a:lnTo>
+                    <a:pt x="6446027" y="334252"/>
+                  </a:lnTo>
+                  <a:lnTo>
+                    <a:pt x="6374404" y="324109"/>
+                  </a:lnTo>
+                  <a:lnTo>
+                    <a:pt x="6302782" y="313758"/>
+                  </a:lnTo>
+                  <a:lnTo>
+                    <a:pt x="6231159" y="303195"/>
+                  </a:lnTo>
+                  <a:lnTo>
+                    <a:pt x="6159537" y="292415"/>
+                  </a:lnTo>
+                  <a:lnTo>
+                    <a:pt x="6087914" y="281414"/>
+                  </a:lnTo>
+                  <a:lnTo>
+                    <a:pt x="6016292" y="270188"/>
+                  </a:lnTo>
+                  <a:lnTo>
+                    <a:pt x="5944669" y="258730"/>
+                  </a:lnTo>
+                  <a:lnTo>
+                    <a:pt x="5873047" y="247038"/>
+                  </a:lnTo>
+                  <a:lnTo>
+                    <a:pt x="5801424" y="235106"/>
+                  </a:lnTo>
+                  <a:lnTo>
+                    <a:pt x="5729802" y="222930"/>
+                  </a:lnTo>
+                  <a:lnTo>
+                    <a:pt x="5658179" y="210503"/>
+                  </a:lnTo>
+                  <a:lnTo>
+                    <a:pt x="5586557" y="197821"/>
+                  </a:lnTo>
+                  <a:lnTo>
+                    <a:pt x="5514934" y="184880"/>
+                  </a:lnTo>
+                  <a:lnTo>
+                    <a:pt x="5443311" y="171672"/>
+                  </a:lnTo>
+                  <a:lnTo>
+                    <a:pt x="5371689" y="158194"/>
+                  </a:lnTo>
+                  <a:lnTo>
+                    <a:pt x="5300066" y="144440"/>
+                  </a:lnTo>
+                  <a:lnTo>
+                    <a:pt x="5228444" y="130403"/>
+                  </a:lnTo>
+                  <a:lnTo>
+                    <a:pt x="5156821" y="116078"/>
+                  </a:lnTo>
+                  <a:lnTo>
+                    <a:pt x="5085199" y="101459"/>
+                  </a:lnTo>
+                  <a:lnTo>
+                    <a:pt x="5013576" y="86540"/>
+                  </a:lnTo>
+                  <a:lnTo>
+                    <a:pt x="4941954" y="71316"/>
+                  </a:lnTo>
+                  <a:lnTo>
+                    <a:pt x="4870331" y="55779"/>
+                  </a:lnTo>
+                  <a:lnTo>
+                    <a:pt x="4798709" y="39923"/>
+                  </a:lnTo>
+                  <a:lnTo>
+                    <a:pt x="4727086" y="23742"/>
+                  </a:lnTo>
+                  <a:lnTo>
+                    <a:pt x="4655464" y="7229"/>
                   </a:lnTo>
                   <a:lnTo>
                     <a:pt x="4583841" y="0"/>
                   </a:lnTo>
                   <a:lnTo>
-                    <a:pt x="4512219" y="2024"/>
-                  </a:lnTo>
-                  <a:lnTo>
-                    <a:pt x="4440596" y="4043"/>
-                  </a:lnTo>
-                  <a:lnTo>
-                    <a:pt x="4368974" y="6058"/>
-                  </a:lnTo>
-                  <a:lnTo>
-                    <a:pt x="4297351" y="8067"/>
-                  </a:lnTo>
-                  <a:lnTo>
-                    <a:pt x="4225729" y="10072"/>
-                  </a:lnTo>
-                  <a:lnTo>
-                    <a:pt x="4154106" y="12071"/>
-                  </a:lnTo>
-                  <a:lnTo>
-                    <a:pt x="4082483" y="14066"/>
-                  </a:lnTo>
-                  <a:lnTo>
-                    <a:pt x="4010861" y="16056"/>
-                  </a:lnTo>
-                  <a:lnTo>
-                    <a:pt x="3939238" y="18041"/>
-                  </a:lnTo>
-                  <a:lnTo>
-                    <a:pt x="3867616" y="20021"/>
-                  </a:lnTo>
-                  <a:lnTo>
-                    <a:pt x="3795993" y="21997"/>
-                  </a:lnTo>
-                  <a:lnTo>
-                    <a:pt x="3724371" y="23967"/>
-                  </a:lnTo>
-                  <a:lnTo>
-                    <a:pt x="3652748" y="25933"/>
-                  </a:lnTo>
-                  <a:lnTo>
-                    <a:pt x="3581126" y="27894"/>
-                  </a:lnTo>
-                  <a:lnTo>
-                    <a:pt x="3509503" y="29850"/>
-                  </a:lnTo>
-                  <a:lnTo>
-                    <a:pt x="3437881" y="31802"/>
-                  </a:lnTo>
-                  <a:lnTo>
-                    <a:pt x="3366258" y="33748"/>
-                  </a:lnTo>
-                  <a:lnTo>
-                    <a:pt x="3294636" y="35690"/>
-                  </a:lnTo>
-                  <a:lnTo>
-                    <a:pt x="3223013" y="37627"/>
-                  </a:lnTo>
-                  <a:lnTo>
-                    <a:pt x="3151391" y="39560"/>
-                  </a:lnTo>
-                  <a:lnTo>
-                    <a:pt x="3079768" y="41487"/>
-                  </a:lnTo>
-                  <a:lnTo>
-                    <a:pt x="3008146" y="43410"/>
-                  </a:lnTo>
-                  <a:lnTo>
-                    <a:pt x="2936523" y="45329"/>
-                  </a:lnTo>
-                  <a:lnTo>
-                    <a:pt x="2864901" y="47242"/>
-                  </a:lnTo>
-                  <a:lnTo>
-                    <a:pt x="2793278" y="49151"/>
-                  </a:lnTo>
-                  <a:lnTo>
-                    <a:pt x="2721655" y="51055"/>
-                  </a:lnTo>
-                  <a:lnTo>
-                    <a:pt x="2650033" y="52955"/>
-                  </a:lnTo>
-                  <a:lnTo>
-                    <a:pt x="2578410" y="54850"/>
-                  </a:lnTo>
-                  <a:lnTo>
-                    <a:pt x="2506788" y="56740"/>
-                  </a:lnTo>
-                  <a:lnTo>
-                    <a:pt x="2435165" y="58626"/>
-                  </a:lnTo>
-                  <a:lnTo>
-                    <a:pt x="2363543" y="60507"/>
-                  </a:lnTo>
-                  <a:lnTo>
-                    <a:pt x="2291920" y="62383"/>
-                  </a:lnTo>
-                  <a:lnTo>
-                    <a:pt x="2220298" y="64255"/>
-                  </a:lnTo>
-                  <a:lnTo>
-                    <a:pt x="2148675" y="66123"/>
-                  </a:lnTo>
-                  <a:lnTo>
-                    <a:pt x="2077053" y="67985"/>
-                  </a:lnTo>
-                  <a:lnTo>
-                    <a:pt x="2005430" y="69844"/>
-                  </a:lnTo>
-                  <a:lnTo>
-                    <a:pt x="1933808" y="71697"/>
-                  </a:lnTo>
-                  <a:lnTo>
-                    <a:pt x="1862185" y="73546"/>
-                  </a:lnTo>
-                  <a:lnTo>
-                    <a:pt x="1790563" y="75391"/>
-                  </a:lnTo>
-                  <a:lnTo>
-                    <a:pt x="1718940" y="77231"/>
-                  </a:lnTo>
-                  <a:lnTo>
-                    <a:pt x="1647318" y="79067"/>
-                  </a:lnTo>
-                  <a:lnTo>
-                    <a:pt x="1575695" y="80898"/>
-                  </a:lnTo>
-                  <a:lnTo>
-                    <a:pt x="1504073" y="82725"/>
-                  </a:lnTo>
-                  <a:lnTo>
-                    <a:pt x="1432450" y="84547"/>
-                  </a:lnTo>
-                  <a:lnTo>
-                    <a:pt x="1360827" y="86365"/>
-                  </a:lnTo>
-                  <a:lnTo>
-                    <a:pt x="1289205" y="88178"/>
-                  </a:lnTo>
-                  <a:lnTo>
-                    <a:pt x="1217582" y="89987"/>
-                  </a:lnTo>
-                  <a:lnTo>
-                    <a:pt x="1145960" y="91791"/>
-                  </a:lnTo>
-                  <a:lnTo>
-                    <a:pt x="1074337" y="93591"/>
-                  </a:lnTo>
-                  <a:lnTo>
-                    <a:pt x="1002715" y="95387"/>
-                  </a:lnTo>
-                  <a:lnTo>
-                    <a:pt x="931092" y="97178"/>
-                  </a:lnTo>
-                  <a:lnTo>
-                    <a:pt x="859470" y="98965"/>
-                  </a:lnTo>
-                  <a:lnTo>
-                    <a:pt x="787847" y="100748"/>
-                  </a:lnTo>
-                  <a:lnTo>
-                    <a:pt x="716225" y="102526"/>
-                  </a:lnTo>
-                  <a:lnTo>
-                    <a:pt x="644602" y="104300"/>
-                  </a:lnTo>
-                  <a:lnTo>
-                    <a:pt x="572980" y="106069"/>
-                  </a:lnTo>
-                  <a:lnTo>
-                    <a:pt x="501357" y="107835"/>
-                  </a:lnTo>
-                  <a:lnTo>
-                    <a:pt x="429735" y="109596"/>
-                  </a:lnTo>
-                  <a:lnTo>
-                    <a:pt x="358112" y="111352"/>
-                  </a:lnTo>
-                  <a:lnTo>
-                    <a:pt x="286490" y="113104"/>
-                  </a:lnTo>
-                  <a:lnTo>
-                    <a:pt x="214867" y="114852"/>
-                  </a:lnTo>
-                  <a:lnTo>
-                    <a:pt x="143245" y="116596"/>
-                  </a:lnTo>
-                  <a:lnTo>
-                    <a:pt x="71622" y="118336"/>
-                  </a:lnTo>
-                  <a:lnTo>
-                    <a:pt x="0" y="120071"/>
+                    <a:pt x="4512219" y="1571"/>
+                  </a:lnTo>
+                  <a:lnTo>
+                    <a:pt x="4440596" y="3139"/>
+                  </a:lnTo>
+                  <a:lnTo>
+                    <a:pt x="4368974" y="4705"/>
+                  </a:lnTo>
+                  <a:lnTo>
+                    <a:pt x="4297351" y="6267"/>
+                  </a:lnTo>
+                  <a:lnTo>
+                    <a:pt x="4225729" y="7827"/>
+                  </a:lnTo>
+                  <a:lnTo>
+                    <a:pt x="4154106" y="9383"/>
+                  </a:lnTo>
+                  <a:lnTo>
+                    <a:pt x="4082483" y="10937"/>
+                  </a:lnTo>
+                  <a:lnTo>
+                    <a:pt x="4010861" y="12487"/>
+                  </a:lnTo>
+                  <a:lnTo>
+                    <a:pt x="3939238" y="14035"/>
+                  </a:lnTo>
+                  <a:lnTo>
+                    <a:pt x="3867616" y="15580"/>
+                  </a:lnTo>
+                  <a:lnTo>
+                    <a:pt x="3795993" y="17122"/>
+                  </a:lnTo>
+                  <a:lnTo>
+                    <a:pt x="3724371" y="18661"/>
+                  </a:lnTo>
+                  <a:lnTo>
+                    <a:pt x="3652748" y="20196"/>
+                  </a:lnTo>
+                  <a:lnTo>
+                    <a:pt x="3581126" y="21730"/>
+                  </a:lnTo>
+                  <a:lnTo>
+                    <a:pt x="3509503" y="23260"/>
+                  </a:lnTo>
+                  <a:lnTo>
+                    <a:pt x="3437881" y="24787"/>
+                  </a:lnTo>
+                  <a:lnTo>
+                    <a:pt x="3366258" y="26311"/>
+                  </a:lnTo>
+                  <a:lnTo>
+                    <a:pt x="3294636" y="27833"/>
+                  </a:lnTo>
+                  <a:lnTo>
+                    <a:pt x="3223013" y="29351"/>
+                  </a:lnTo>
+                  <a:lnTo>
+                    <a:pt x="3151391" y="30867"/>
+                  </a:lnTo>
+                  <a:lnTo>
+                    <a:pt x="3079768" y="32380"/>
+                  </a:lnTo>
+                  <a:lnTo>
+                    <a:pt x="3008146" y="33890"/>
+                  </a:lnTo>
+                  <a:lnTo>
+                    <a:pt x="2936523" y="35397"/>
+                  </a:lnTo>
+                  <a:lnTo>
+                    <a:pt x="2864901" y="36901"/>
+                  </a:lnTo>
+                  <a:lnTo>
+                    <a:pt x="2793278" y="38403"/>
+                  </a:lnTo>
+                  <a:lnTo>
+                    <a:pt x="2721655" y="39901"/>
+                  </a:lnTo>
+                  <a:lnTo>
+                    <a:pt x="2650033" y="41397"/>
+                  </a:lnTo>
+                  <a:lnTo>
+                    <a:pt x="2578410" y="42890"/>
+                  </a:lnTo>
+                  <a:lnTo>
+                    <a:pt x="2506788" y="44380"/>
+                  </a:lnTo>
+                  <a:lnTo>
+                    <a:pt x="2435165" y="45867"/>
+                  </a:lnTo>
+                  <a:lnTo>
+                    <a:pt x="2363543" y="47351"/>
+                  </a:lnTo>
+                  <a:lnTo>
+                    <a:pt x="2291920" y="48833"/>
+                  </a:lnTo>
+                  <a:lnTo>
+                    <a:pt x="2220298" y="50312"/>
+                  </a:lnTo>
+                  <a:lnTo>
+                    <a:pt x="2148675" y="51788"/>
+                  </a:lnTo>
+                  <a:lnTo>
+                    <a:pt x="2077053" y="53261"/>
+                  </a:lnTo>
+                  <a:lnTo>
+                    <a:pt x="2005430" y="54731"/>
+                  </a:lnTo>
+                  <a:lnTo>
+                    <a:pt x="1933808" y="56199"/>
+                  </a:lnTo>
+                  <a:lnTo>
+                    <a:pt x="1862185" y="57664"/>
+                  </a:lnTo>
+                  <a:lnTo>
+                    <a:pt x="1790563" y="59126"/>
+                  </a:lnTo>
+                  <a:lnTo>
+                    <a:pt x="1718940" y="60585"/>
+                  </a:lnTo>
+                  <a:lnTo>
+                    <a:pt x="1647318" y="62041"/>
+                  </a:lnTo>
+                  <a:lnTo>
+                    <a:pt x="1575695" y="63495"/>
+                  </a:lnTo>
+                  <a:lnTo>
+                    <a:pt x="1504073" y="64946"/>
+                  </a:lnTo>
+                  <a:lnTo>
+                    <a:pt x="1432450" y="66394"/>
+                  </a:lnTo>
+                  <a:lnTo>
+                    <a:pt x="1360827" y="67840"/>
+                  </a:lnTo>
+                  <a:lnTo>
+                    <a:pt x="1289205" y="69282"/>
+                  </a:lnTo>
+                  <a:lnTo>
+                    <a:pt x="1217582" y="70722"/>
+                  </a:lnTo>
+                  <a:lnTo>
+                    <a:pt x="1145960" y="72160"/>
+                  </a:lnTo>
+                  <a:lnTo>
+                    <a:pt x="1074337" y="73594"/>
+                  </a:lnTo>
+                  <a:lnTo>
+                    <a:pt x="1002715" y="75026"/>
+                  </a:lnTo>
+                  <a:lnTo>
+                    <a:pt x="931092" y="76455"/>
+                  </a:lnTo>
+                  <a:lnTo>
+                    <a:pt x="859470" y="77882"/>
+                  </a:lnTo>
+                  <a:lnTo>
+                    <a:pt x="787847" y="79305"/>
+                  </a:lnTo>
+                  <a:lnTo>
+                    <a:pt x="716225" y="80726"/>
+                  </a:lnTo>
+                  <a:lnTo>
+                    <a:pt x="644602" y="82144"/>
+                  </a:lnTo>
+                  <a:lnTo>
+                    <a:pt x="572980" y="83560"/>
+                  </a:lnTo>
+                  <a:lnTo>
+                    <a:pt x="501357" y="84973"/>
+                  </a:lnTo>
+                  <a:lnTo>
+                    <a:pt x="429735" y="86383"/>
+                  </a:lnTo>
+                  <a:lnTo>
+                    <a:pt x="358112" y="87791"/>
+                  </a:lnTo>
+                  <a:lnTo>
+                    <a:pt x="286490" y="89196"/>
+                  </a:lnTo>
+                  <a:lnTo>
+                    <a:pt x="214867" y="90598"/>
+                  </a:lnTo>
+                  <a:lnTo>
+                    <a:pt x="143245" y="91997"/>
+                  </a:lnTo>
+                  <a:lnTo>
+                    <a:pt x="71622" y="93394"/>
+                  </a:lnTo>
+                  <a:lnTo>
+                    <a:pt x="0" y="94789"/>
                   </a:lnTo>
                 </a:path>
               </a:pathLst>
@@ -4197,312 +4197,312 @@
           </p:nvSpPr>
           <p:spPr>
             <a:xfrm>
-              <a:off x="1172049" y="4109691"/>
-              <a:ext cx="7090630" cy="832657"/>
+              <a:off x="1172049" y="4055057"/>
+              <a:ext cx="7090630" cy="898302"/>
             </a:xfrm>
             <a:custGeom>
               <a:avLst/>
               <a:pathLst>
-                <a:path w="7090630" h="832657">
+                <a:path w="7090630" h="898302">
                   <a:moveTo>
                     <a:pt x="0" y="0"/>
                   </a:moveTo>
                   <a:lnTo>
-                    <a:pt x="71622" y="12464"/>
-                  </a:lnTo>
-                  <a:lnTo>
-                    <a:pt x="143245" y="24822"/>
-                  </a:lnTo>
-                  <a:lnTo>
-                    <a:pt x="214867" y="37073"/>
-                  </a:lnTo>
-                  <a:lnTo>
-                    <a:pt x="286490" y="49218"/>
-                  </a:lnTo>
-                  <a:lnTo>
-                    <a:pt x="358112" y="61259"/>
-                  </a:lnTo>
-                  <a:lnTo>
-                    <a:pt x="429735" y="73197"/>
-                  </a:lnTo>
-                  <a:lnTo>
-                    <a:pt x="501357" y="85031"/>
-                  </a:lnTo>
-                  <a:lnTo>
-                    <a:pt x="572980" y="96764"/>
-                  </a:lnTo>
-                  <a:lnTo>
-                    <a:pt x="644602" y="108395"/>
-                  </a:lnTo>
-                  <a:lnTo>
-                    <a:pt x="716225" y="119927"/>
-                  </a:lnTo>
-                  <a:lnTo>
-                    <a:pt x="787847" y="131359"/>
-                  </a:lnTo>
-                  <a:lnTo>
-                    <a:pt x="859470" y="142693"/>
-                  </a:lnTo>
-                  <a:lnTo>
-                    <a:pt x="931092" y="153929"/>
-                  </a:lnTo>
-                  <a:lnTo>
-                    <a:pt x="1002715" y="165068"/>
-                  </a:lnTo>
-                  <a:lnTo>
-                    <a:pt x="1074337" y="176112"/>
-                  </a:lnTo>
-                  <a:lnTo>
-                    <a:pt x="1145960" y="187060"/>
-                  </a:lnTo>
-                  <a:lnTo>
-                    <a:pt x="1217582" y="197914"/>
-                  </a:lnTo>
-                  <a:lnTo>
-                    <a:pt x="1289205" y="208675"/>
-                  </a:lnTo>
-                  <a:lnTo>
-                    <a:pt x="1360827" y="219342"/>
-                  </a:lnTo>
-                  <a:lnTo>
-                    <a:pt x="1432450" y="229919"/>
-                  </a:lnTo>
-                  <a:lnTo>
-                    <a:pt x="1504073" y="240404"/>
-                  </a:lnTo>
-                  <a:lnTo>
-                    <a:pt x="1575695" y="250798"/>
-                  </a:lnTo>
-                  <a:lnTo>
-                    <a:pt x="1647318" y="261103"/>
-                  </a:lnTo>
-                  <a:lnTo>
-                    <a:pt x="1718940" y="271320"/>
-                  </a:lnTo>
-                  <a:lnTo>
-                    <a:pt x="1790563" y="281448"/>
-                  </a:lnTo>
-                  <a:lnTo>
-                    <a:pt x="1862185" y="291490"/>
-                  </a:lnTo>
-                  <a:lnTo>
-                    <a:pt x="1933808" y="301444"/>
-                  </a:lnTo>
-                  <a:lnTo>
-                    <a:pt x="2005430" y="311314"/>
-                  </a:lnTo>
-                  <a:lnTo>
-                    <a:pt x="2077053" y="321098"/>
-                  </a:lnTo>
-                  <a:lnTo>
-                    <a:pt x="2148675" y="330798"/>
-                  </a:lnTo>
-                  <a:lnTo>
-                    <a:pt x="2220298" y="340414"/>
-                  </a:lnTo>
-                  <a:lnTo>
-                    <a:pt x="2291920" y="349947"/>
-                  </a:lnTo>
-                  <a:lnTo>
-                    <a:pt x="2363543" y="359399"/>
-                  </a:lnTo>
-                  <a:lnTo>
-                    <a:pt x="2435165" y="368769"/>
-                  </a:lnTo>
-                  <a:lnTo>
-                    <a:pt x="2506788" y="378058"/>
-                  </a:lnTo>
-                  <a:lnTo>
-                    <a:pt x="2578410" y="387268"/>
-                  </a:lnTo>
-                  <a:lnTo>
-                    <a:pt x="2650033" y="396398"/>
-                  </a:lnTo>
-                  <a:lnTo>
-                    <a:pt x="2721655" y="405449"/>
-                  </a:lnTo>
-                  <a:lnTo>
-                    <a:pt x="2793278" y="414423"/>
-                  </a:lnTo>
-                  <a:lnTo>
-                    <a:pt x="2864901" y="423319"/>
-                  </a:lnTo>
-                  <a:lnTo>
-                    <a:pt x="2936523" y="432139"/>
-                  </a:lnTo>
-                  <a:lnTo>
-                    <a:pt x="3008146" y="440882"/>
-                  </a:lnTo>
-                  <a:lnTo>
-                    <a:pt x="3079768" y="449551"/>
-                  </a:lnTo>
-                  <a:lnTo>
-                    <a:pt x="3151391" y="458144"/>
-                  </a:lnTo>
-                  <a:lnTo>
-                    <a:pt x="3223013" y="466664"/>
-                  </a:lnTo>
-                  <a:lnTo>
-                    <a:pt x="3294636" y="475111"/>
-                  </a:lnTo>
-                  <a:lnTo>
-                    <a:pt x="3366258" y="483484"/>
-                  </a:lnTo>
-                  <a:lnTo>
-                    <a:pt x="3437881" y="491786"/>
-                  </a:lnTo>
-                  <a:lnTo>
-                    <a:pt x="3509503" y="500016"/>
-                  </a:lnTo>
-                  <a:lnTo>
-                    <a:pt x="3581126" y="508175"/>
-                  </a:lnTo>
-                  <a:lnTo>
-                    <a:pt x="3652748" y="516264"/>
-                  </a:lnTo>
-                  <a:lnTo>
-                    <a:pt x="3724371" y="524283"/>
-                  </a:lnTo>
-                  <a:lnTo>
-                    <a:pt x="3795993" y="532234"/>
-                  </a:lnTo>
-                  <a:lnTo>
-                    <a:pt x="3867616" y="540115"/>
-                  </a:lnTo>
-                  <a:lnTo>
-                    <a:pt x="3939238" y="547929"/>
-                  </a:lnTo>
-                  <a:lnTo>
-                    <a:pt x="4010861" y="555676"/>
-                  </a:lnTo>
-                  <a:lnTo>
-                    <a:pt x="4082483" y="563356"/>
-                  </a:lnTo>
-                  <a:lnTo>
-                    <a:pt x="4154106" y="570970"/>
-                  </a:lnTo>
-                  <a:lnTo>
-                    <a:pt x="4225729" y="578518"/>
-                  </a:lnTo>
-                  <a:lnTo>
-                    <a:pt x="4297351" y="586001"/>
-                  </a:lnTo>
-                  <a:lnTo>
-                    <a:pt x="4368974" y="593420"/>
-                  </a:lnTo>
-                  <a:lnTo>
-                    <a:pt x="4440596" y="600775"/>
-                  </a:lnTo>
-                  <a:lnTo>
-                    <a:pt x="4512219" y="608066"/>
-                  </a:lnTo>
-                  <a:lnTo>
-                    <a:pt x="4583841" y="615295"/>
-                  </a:lnTo>
-                  <a:lnTo>
-                    <a:pt x="4655464" y="622462"/>
-                  </a:lnTo>
-                  <a:lnTo>
-                    <a:pt x="4727086" y="629567"/>
-                  </a:lnTo>
-                  <a:lnTo>
-                    <a:pt x="4798709" y="636610"/>
-                  </a:lnTo>
-                  <a:lnTo>
-                    <a:pt x="4870331" y="643593"/>
-                  </a:lnTo>
-                  <a:lnTo>
-                    <a:pt x="4941954" y="650516"/>
-                  </a:lnTo>
-                  <a:lnTo>
-                    <a:pt x="5013576" y="657379"/>
-                  </a:lnTo>
-                  <a:lnTo>
-                    <a:pt x="5085199" y="664184"/>
-                  </a:lnTo>
-                  <a:lnTo>
-                    <a:pt x="5156821" y="670929"/>
-                  </a:lnTo>
-                  <a:lnTo>
-                    <a:pt x="5228444" y="677617"/>
-                  </a:lnTo>
-                  <a:lnTo>
-                    <a:pt x="5300066" y="684247"/>
-                  </a:lnTo>
-                  <a:lnTo>
-                    <a:pt x="5371689" y="690819"/>
-                  </a:lnTo>
-                  <a:lnTo>
-                    <a:pt x="5443311" y="697336"/>
-                  </a:lnTo>
-                  <a:lnTo>
-                    <a:pt x="5514934" y="703796"/>
-                  </a:lnTo>
-                  <a:lnTo>
-                    <a:pt x="5586557" y="710200"/>
-                  </a:lnTo>
-                  <a:lnTo>
-                    <a:pt x="5658179" y="716550"/>
-                  </a:lnTo>
-                  <a:lnTo>
-                    <a:pt x="5729802" y="722844"/>
-                  </a:lnTo>
-                  <a:lnTo>
-                    <a:pt x="5801424" y="729085"/>
-                  </a:lnTo>
-                  <a:lnTo>
-                    <a:pt x="5873047" y="735271"/>
-                  </a:lnTo>
-                  <a:lnTo>
-                    <a:pt x="5944669" y="741405"/>
-                  </a:lnTo>
-                  <a:lnTo>
-                    <a:pt x="6016292" y="747485"/>
-                  </a:lnTo>
-                  <a:lnTo>
-                    <a:pt x="6087914" y="753514"/>
-                  </a:lnTo>
-                  <a:lnTo>
-                    <a:pt x="6159537" y="759490"/>
-                  </a:lnTo>
-                  <a:lnTo>
-                    <a:pt x="6231159" y="765415"/>
-                  </a:lnTo>
-                  <a:lnTo>
-                    <a:pt x="6302782" y="771289"/>
-                  </a:lnTo>
-                  <a:lnTo>
-                    <a:pt x="6374404" y="777112"/>
-                  </a:lnTo>
-                  <a:lnTo>
-                    <a:pt x="6446027" y="782885"/>
-                  </a:lnTo>
-                  <a:lnTo>
-                    <a:pt x="6517649" y="788609"/>
-                  </a:lnTo>
-                  <a:lnTo>
-                    <a:pt x="6589272" y="794283"/>
-                  </a:lnTo>
-                  <a:lnTo>
-                    <a:pt x="6660894" y="799908"/>
-                  </a:lnTo>
-                  <a:lnTo>
-                    <a:pt x="6732517" y="805485"/>
-                  </a:lnTo>
-                  <a:lnTo>
-                    <a:pt x="6804139" y="811014"/>
-                  </a:lnTo>
-                  <a:lnTo>
-                    <a:pt x="6875762" y="816495"/>
-                  </a:lnTo>
-                  <a:lnTo>
-                    <a:pt x="6947385" y="821929"/>
-                  </a:lnTo>
-                  <a:lnTo>
-                    <a:pt x="7019007" y="827316"/>
-                  </a:lnTo>
-                  <a:lnTo>
-                    <a:pt x="7090630" y="832657"/>
+                    <a:pt x="71622" y="13764"/>
+                  </a:lnTo>
+                  <a:lnTo>
+                    <a:pt x="143245" y="27402"/>
+                  </a:lnTo>
+                  <a:lnTo>
+                    <a:pt x="214867" y="40915"/>
+                  </a:lnTo>
+                  <a:lnTo>
+                    <a:pt x="286490" y="54304"/>
+                  </a:lnTo>
+                  <a:lnTo>
+                    <a:pt x="358112" y="67571"/>
+                  </a:lnTo>
+                  <a:lnTo>
+                    <a:pt x="429735" y="80716"/>
+                  </a:lnTo>
+                  <a:lnTo>
+                    <a:pt x="501357" y="93740"/>
+                  </a:lnTo>
+                  <a:lnTo>
+                    <a:pt x="572980" y="106645"/>
+                  </a:lnTo>
+                  <a:lnTo>
+                    <a:pt x="644602" y="119432"/>
+                  </a:lnTo>
+                  <a:lnTo>
+                    <a:pt x="716225" y="132102"/>
+                  </a:lnTo>
+                  <a:lnTo>
+                    <a:pt x="787847" y="144656"/>
+                  </a:lnTo>
+                  <a:lnTo>
+                    <a:pt x="859470" y="157094"/>
+                  </a:lnTo>
+                  <a:lnTo>
+                    <a:pt x="931092" y="169419"/>
+                  </a:lnTo>
+                  <a:lnTo>
+                    <a:pt x="1002715" y="181631"/>
+                  </a:lnTo>
+                  <a:lnTo>
+                    <a:pt x="1074337" y="193731"/>
+                  </a:lnTo>
+                  <a:lnTo>
+                    <a:pt x="1145960" y="205720"/>
+                  </a:lnTo>
+                  <a:lnTo>
+                    <a:pt x="1217582" y="217599"/>
+                  </a:lnTo>
+                  <a:lnTo>
+                    <a:pt x="1289205" y="229369"/>
+                  </a:lnTo>
+                  <a:lnTo>
+                    <a:pt x="1360827" y="241032"/>
+                  </a:lnTo>
+                  <a:lnTo>
+                    <a:pt x="1432450" y="252588"/>
+                  </a:lnTo>
+                  <a:lnTo>
+                    <a:pt x="1504073" y="264037"/>
+                  </a:lnTo>
+                  <a:lnTo>
+                    <a:pt x="1575695" y="275382"/>
+                  </a:lnTo>
+                  <a:lnTo>
+                    <a:pt x="1647318" y="286623"/>
+                  </a:lnTo>
+                  <a:lnTo>
+                    <a:pt x="1718940" y="297761"/>
+                  </a:lnTo>
+                  <a:lnTo>
+                    <a:pt x="1790563" y="308797"/>
+                  </a:lnTo>
+                  <a:lnTo>
+                    <a:pt x="1862185" y="319731"/>
+                  </a:lnTo>
+                  <a:lnTo>
+                    <a:pt x="1933808" y="330566"/>
+                  </a:lnTo>
+                  <a:lnTo>
+                    <a:pt x="2005430" y="341301"/>
+                  </a:lnTo>
+                  <a:lnTo>
+                    <a:pt x="2077053" y="351938"/>
+                  </a:lnTo>
+                  <a:lnTo>
+                    <a:pt x="2148675" y="362478"/>
+                  </a:lnTo>
+                  <a:lnTo>
+                    <a:pt x="2220298" y="372920"/>
+                  </a:lnTo>
+                  <a:lnTo>
+                    <a:pt x="2291920" y="383268"/>
+                  </a:lnTo>
+                  <a:lnTo>
+                    <a:pt x="2363543" y="393520"/>
+                  </a:lnTo>
+                  <a:lnTo>
+                    <a:pt x="2435165" y="403678"/>
+                  </a:lnTo>
+                  <a:lnTo>
+                    <a:pt x="2506788" y="413744"/>
+                  </a:lnTo>
+                  <a:lnTo>
+                    <a:pt x="2578410" y="423717"/>
+                  </a:lnTo>
+                  <a:lnTo>
+                    <a:pt x="2650033" y="433599"/>
+                  </a:lnTo>
+                  <a:lnTo>
+                    <a:pt x="2721655" y="443390"/>
+                  </a:lnTo>
+                  <a:lnTo>
+                    <a:pt x="2793278" y="453091"/>
+                  </a:lnTo>
+                  <a:lnTo>
+                    <a:pt x="2864901" y="462704"/>
+                  </a:lnTo>
+                  <a:lnTo>
+                    <a:pt x="2936523" y="472228"/>
+                  </a:lnTo>
+                  <a:lnTo>
+                    <a:pt x="3008146" y="481666"/>
+                  </a:lnTo>
+                  <a:lnTo>
+                    <a:pt x="3079768" y="491016"/>
+                  </a:lnTo>
+                  <a:lnTo>
+                    <a:pt x="3151391" y="500282"/>
+                  </a:lnTo>
+                  <a:lnTo>
+                    <a:pt x="3223013" y="509462"/>
+                  </a:lnTo>
+                  <a:lnTo>
+                    <a:pt x="3294636" y="518558"/>
+                  </a:lnTo>
+                  <a:lnTo>
+                    <a:pt x="3366258" y="527571"/>
+                  </a:lnTo>
+                  <a:lnTo>
+                    <a:pt x="3437881" y="536501"/>
+                  </a:lnTo>
+                  <a:lnTo>
+                    <a:pt x="3509503" y="545349"/>
+                  </a:lnTo>
+                  <a:lnTo>
+                    <a:pt x="3581126" y="554116"/>
+                  </a:lnTo>
+                  <a:lnTo>
+                    <a:pt x="3652748" y="562803"/>
+                  </a:lnTo>
+                  <a:lnTo>
+                    <a:pt x="3724371" y="571411"/>
+                  </a:lnTo>
+                  <a:lnTo>
+                    <a:pt x="3795993" y="579939"/>
+                  </a:lnTo>
+                  <a:lnTo>
+                    <a:pt x="3867616" y="588389"/>
+                  </a:lnTo>
+                  <a:lnTo>
+                    <a:pt x="3939238" y="596762"/>
+                  </a:lnTo>
+                  <a:lnTo>
+                    <a:pt x="4010861" y="605058"/>
+                  </a:lnTo>
+                  <a:lnTo>
+                    <a:pt x="4082483" y="613279"/>
+                  </a:lnTo>
+                  <a:lnTo>
+                    <a:pt x="4154106" y="621423"/>
+                  </a:lnTo>
+                  <a:lnTo>
+                    <a:pt x="4225729" y="629494"/>
+                  </a:lnTo>
+                  <a:lnTo>
+                    <a:pt x="4297351" y="637490"/>
+                  </a:lnTo>
+                  <a:lnTo>
+                    <a:pt x="4368974" y="645413"/>
+                  </a:lnTo>
+                  <a:lnTo>
+                    <a:pt x="4440596" y="653263"/>
+                  </a:lnTo>
+                  <a:lnTo>
+                    <a:pt x="4512219" y="661042"/>
+                  </a:lnTo>
+                  <a:lnTo>
+                    <a:pt x="4583841" y="668749"/>
+                  </a:lnTo>
+                  <a:lnTo>
+                    <a:pt x="4655464" y="676386"/>
+                  </a:lnTo>
+                  <a:lnTo>
+                    <a:pt x="4727086" y="683952"/>
+                  </a:lnTo>
+                  <a:lnTo>
+                    <a:pt x="4798709" y="691449"/>
+                  </a:lnTo>
+                  <a:lnTo>
+                    <a:pt x="4870331" y="698878"/>
+                  </a:lnTo>
+                  <a:lnTo>
+                    <a:pt x="4941954" y="706239"/>
+                  </a:lnTo>
+                  <a:lnTo>
+                    <a:pt x="5013576" y="713532"/>
+                  </a:lnTo>
+                  <a:lnTo>
+                    <a:pt x="5085199" y="720758"/>
+                  </a:lnTo>
+                  <a:lnTo>
+                    <a:pt x="5156821" y="727918"/>
+                  </a:lnTo>
+                  <a:lnTo>
+                    <a:pt x="5228444" y="735012"/>
+                  </a:lnTo>
+                  <a:lnTo>
+                    <a:pt x="5300066" y="742042"/>
+                  </a:lnTo>
+                  <a:lnTo>
+                    <a:pt x="5371689" y="749007"/>
+                  </a:lnTo>
+                  <a:lnTo>
+                    <a:pt x="5443311" y="755908"/>
+                  </a:lnTo>
+                  <a:lnTo>
+                    <a:pt x="5514934" y="762746"/>
+                  </a:lnTo>
+                  <a:lnTo>
+                    <a:pt x="5586557" y="769521"/>
+                  </a:lnTo>
+                  <a:lnTo>
+                    <a:pt x="5658179" y="776235"/>
+                  </a:lnTo>
+                  <a:lnTo>
+                    <a:pt x="5729802" y="782886"/>
+                  </a:lnTo>
+                  <a:lnTo>
+                    <a:pt x="5801424" y="789477"/>
+                  </a:lnTo>
+                  <a:lnTo>
+                    <a:pt x="5873047" y="796007"/>
+                  </a:lnTo>
+                  <a:lnTo>
+                    <a:pt x="5944669" y="802478"/>
+                  </a:lnTo>
+                  <a:lnTo>
+                    <a:pt x="6016292" y="808889"/>
+                  </a:lnTo>
+                  <a:lnTo>
+                    <a:pt x="6087914" y="815242"/>
+                  </a:lnTo>
+                  <a:lnTo>
+                    <a:pt x="6159537" y="821536"/>
+                  </a:lnTo>
+                  <a:lnTo>
+                    <a:pt x="6231159" y="827773"/>
+                  </a:lnTo>
+                  <a:lnTo>
+                    <a:pt x="6302782" y="833952"/>
+                  </a:lnTo>
+                  <a:lnTo>
+                    <a:pt x="6374404" y="840075"/>
+                  </a:lnTo>
+                  <a:lnTo>
+                    <a:pt x="6446027" y="846142"/>
+                  </a:lnTo>
+                  <a:lnTo>
+                    <a:pt x="6517649" y="852153"/>
+                  </a:lnTo>
+                  <a:lnTo>
+                    <a:pt x="6589272" y="858109"/>
+                  </a:lnTo>
+                  <a:lnTo>
+                    <a:pt x="6660894" y="864011"/>
+                  </a:lnTo>
+                  <a:lnTo>
+                    <a:pt x="6732517" y="869858"/>
+                  </a:lnTo>
+                  <a:lnTo>
+                    <a:pt x="6804139" y="875652"/>
+                  </a:lnTo>
+                  <a:lnTo>
+                    <a:pt x="6875762" y="881393"/>
+                  </a:lnTo>
+                  <a:lnTo>
+                    <a:pt x="6947385" y="887081"/>
+                  </a:lnTo>
+                  <a:lnTo>
+                    <a:pt x="7019007" y="892717"/>
+                  </a:lnTo>
+                  <a:lnTo>
+                    <a:pt x="7090630" y="898302"/>
                   </a:lnTo>
                 </a:path>
               </a:pathLst>
@@ -4574,7 +4574,7 @@
           </p:nvSpPr>
           <p:spPr>
             <a:xfrm>
-              <a:off x="5783789" y="2073503"/>
+              <a:off x="5793129" y="2073503"/>
               <a:ext cx="0" cy="3649639"/>
             </a:xfrm>
             <a:custGeom>
@@ -4617,7 +4617,7 @@
           </p:nvSpPr>
           <p:spPr>
             <a:xfrm>
-              <a:off x="4658599" y="2073503"/>
+              <a:off x="4667548" y="2073503"/>
               <a:ext cx="0" cy="3649639"/>
             </a:xfrm>
             <a:custGeom>
@@ -4660,7 +4660,7 @@
           </p:nvSpPr>
           <p:spPr>
             <a:xfrm>
-              <a:off x="6864197" y="2073503"/>
+              <a:off x="6868063" y="2073503"/>
               <a:ext cx="0" cy="3649639"/>
             </a:xfrm>
             <a:custGeom>
@@ -4933,7 +4933,7 @@
           </p:nvSpPr>
           <p:spPr>
             <a:xfrm>
-              <a:off x="3120823" y="5785772"/>
+              <a:off x="3120990" y="5785772"/>
               <a:ext cx="161574" cy="80101"/>
             </a:xfrm>
             <a:prstGeom prst="rect">
@@ -4979,7 +4979,7 @@
           </p:nvSpPr>
           <p:spPr>
             <a:xfrm>
-              <a:off x="5688698" y="5785772"/>
+              <a:off x="5688107" y="5785772"/>
               <a:ext cx="62179" cy="80101"/>
             </a:xfrm>
             <a:prstGeom prst="rect">
@@ -5025,7 +5025,7 @@
           </p:nvSpPr>
           <p:spPr>
             <a:xfrm>
-              <a:off x="8175787" y="5785772"/>
+              <a:off x="8174437" y="5785772"/>
               <a:ext cx="124358" cy="80101"/>
             </a:xfrm>
             <a:prstGeom prst="rect">
@@ -5196,7 +5196,7 @@
                   <a:latin typeface="Helvetica"/>
                   <a:cs typeface="Helvetica"/>
                 </a:rPr>
-                <a:t>subHR per 10 mL/min decline: 1.13 (0.97-1.32), p_Bonf = 0.759 (n = 6)  |  per IQR decline (Δ = 21.9): 1.31 (0.93-1.84)  |  IQR: [-10.5, 11.4]</a:t>
+                <a:t>subHR per 10 mL/min decline: 1.14 (0.97-1.33), p_Bonf = 0.625 (n = 6)  |  per IQR decline (Δ = 21.9): 1.33 (0.94-1.87)  |  IQR: [-10.4, 11.4]</a:t>
               </a:r>
             </a:p>
           </p:txBody>
